--- a/docs/presentation/lectora-hackathon-defense.pptx
+++ b/docs/presentation/lectora-hackathon-defense.pptx
@@ -12,6 +12,7 @@
     <p:sldId id="260" r:id="rId12"/>
     <p:sldId id="261" r:id="rId13"/>
     <p:sldId id="262" r:id="rId14"/>
+    <p:sldId id="263" r:id="rId15"/>
   </p:sldIdLst>
   <p:sldSz cx="12191695" cy="6858000" type="screen4x3"/>
   <p:notesSz cx="6858000" cy="9144000"/>
@@ -858,7 +859,7 @@
           <a:lstStyle/>
           <a:p>
             <a:r>
-              <a:t>Главное отличие Lectora — не отдельная AI-функция, а цельный сценарий. Семантический поиск ведёт прямо к моменту. Локальный и облачный режимы дают выбор между приватностью и качеством. Права доступа позволяют использовать платформу и внутри команды, и публично. А мультиязычность делает одну запись полезной для более широкой аудитории.</a:t>
+              <a:t>Главное отличие Lectora — не отдельная AI-функция, а цельный сценарий. Семантический поиск ведёт прямо к моменту. Локальный и облачный режимы дают выбор между приватностью и качеством. Группы можно открывать по публичной или приватной ссылке. А мультиязычность делает одну запись полезной для более широкой аудитории.</a:t>
             </a:r>
           </a:p>
         </p:txBody>
@@ -884,6 +885,76 @@
 </file>
 
 <file path=ppt/notesSlides/notesSlide7.xml><?xml version="1.0" encoding="utf-8"?>
+<p:notes xmlns:a="http://schemas.openxmlformats.org/drawingml/2006/main" xmlns:p="http://schemas.openxmlformats.org/presentationml/2006/main" xmlns:r="http://schemas.openxmlformats.org/officeDocument/2006/relationships">
+  <p:cSld>
+    <p:spTree>
+      <p:nvGrpSpPr>
+        <p:cNvPr id="1" name=""/>
+        <p:cNvGrpSpPr/>
+        <p:nvPr/>
+      </p:nvGrpSpPr>
+      <p:grpSpPr>
+        <a:xfrm>
+          <a:off x="0" y="0"/>
+          <a:ext cx="0" cy="0"/>
+          <a:chOff x="0" y="0"/>
+          <a:chExt cx="0" cy="0"/>
+        </a:xfrm>
+      </p:grpSpPr>
+      <p:sp>
+        <p:nvSpPr>
+          <p:cNvPr id="2" name="Slide Image Placeholder 1"/>
+          <p:cNvSpPr>
+            <a:spLocks noGrp="1"/>
+          </p:cNvSpPr>
+          <p:nvPr>
+            <p:ph type="sldImg" idx="2"/>
+          </p:nvPr>
+        </p:nvSpPr>
+        <p:spPr/>
+      </p:sp>
+      <p:sp>
+        <p:nvSpPr>
+          <p:cNvPr id="3" name="Notes Placeholder 2"/>
+          <p:cNvSpPr>
+            <a:spLocks noGrp="1"/>
+          </p:cNvSpPr>
+          <p:nvPr>
+            <p:ph type="body" idx="3" sz="quarter"/>
+          </p:nvPr>
+        </p:nvSpPr>
+        <p:spPr/>
+        <p:txBody>
+          <a:bodyPr/>
+          <a:lstStyle/>
+          <a:p>
+            <a:r>
+              <a:t>После MVP мы закрыли сценарии повторного использования. Видео или целый курс можно открыть по публичной либо приватной ссылке — кнопка «Поделиться» стоит там, где ссылка действительно существует. По готовым конспектам группы собирается шпаргалка к экзамену: билеты, определения и формулы со ссылками на таймкоды. А в настройках аккаунта меняются имя и пароль и завершается сессия.</a:t>
+            </a:r>
+          </a:p>
+        </p:txBody>
+      </p:sp>
+      <p:sp>
+        <p:nvSpPr>
+          <p:cNvPr id="4" name="Slide Number Placeholder 3"/>
+          <p:cNvSpPr>
+            <a:spLocks noGrp="1"/>
+          </p:cNvSpPr>
+          <p:nvPr>
+            <p:ph type="sldNum" idx="5" sz="quarter"/>
+          </p:nvPr>
+        </p:nvSpPr>
+        <p:spPr/>
+      </p:sp>
+    </p:spTree>
+  </p:cSld>
+  <p:clrMapOvr>
+    <a:masterClrMapping/>
+  </p:clrMapOvr>
+</p:notes>
+</file>
+
+<file path=ppt/notesSlides/notesSlide8.xml><?xml version="1.0" encoding="utf-8"?>
 <p:notes xmlns:a="http://schemas.openxmlformats.org/drawingml/2006/main" xmlns:p="http://schemas.openxmlformats.org/presentationml/2006/main" xmlns:r="http://schemas.openxmlformats.org/officeDocument/2006/relationships">
   <p:cSld>
     <p:spTree>
@@ -8992,7 +9063,7 @@
                 </a:solidFill>
                 <a:latin typeface="Arial"/>
               </a:rPr>
-              <a:t>Группы, права и просмотр по ссылке</a:t>
+              <a:t>Группы, публичные и приватные ссылки</a:t>
             </a:r>
           </a:p>
         </p:txBody>
@@ -9268,7 +9339,7 @@
                 </a:solidFill>
                 <a:latin typeface="Arial"/>
               </a:rPr>
-              <a:t>ИТОГ · 20 СЕКУНД</a:t>
+              <a:t>НОВЫЕ СЦЕНАРИИ · 30 СЕКУНД</a:t>
             </a:r>
           </a:p>
         </p:txBody>
@@ -9307,7 +9378,7 @@
                 </a:solidFill>
                 <a:latin typeface="Arial"/>
               </a:rPr>
-              <a:t>Lectora готова к пилоту и масштабированию после хакатона</a:t>
+              <a:t>Курсы, ссылки и шпаргалка превращают записи в учебный материал</a:t>
             </a:r>
           </a:p>
         </p:txBody>
@@ -9392,6 +9463,1073 @@
                 <a:latin typeface="Arial"/>
               </a:rPr>
               <a:t>07</a:t>
+            </a:r>
+          </a:p>
+        </p:txBody>
+      </p:sp>
+      <p:sp>
+        <p:nvSpPr>
+          <p:cNvPr id="6" name="Rounded Rectangle 5"/>
+          <p:cNvSpPr/>
+          <p:nvPr/>
+        </p:nvSpPr>
+        <p:spPr>
+          <a:xfrm>
+            <a:off x="713232" y="1664208"/>
+            <a:ext cx="3456432" cy="1298448"/>
+          </a:xfrm>
+          <a:prstGeom prst="roundRect">
+            <a:avLst>
+              <a:gd name="adj" fmla="val 12000"/>
+            </a:avLst>
+          </a:prstGeom>
+          <a:solidFill>
+            <a:srgbClr val="121826"/>
+          </a:solidFill>
+          <a:ln>
+            <a:solidFill>
+              <a:srgbClr val="192032"/>
+            </a:solidFill>
+          </a:ln>
+        </p:spPr>
+        <p:style>
+          <a:lnRef idx="1">
+            <a:schemeClr val="accent1"/>
+          </a:lnRef>
+          <a:fillRef idx="3">
+            <a:schemeClr val="accent1"/>
+          </a:fillRef>
+          <a:effectRef idx="2">
+            <a:schemeClr val="accent1"/>
+          </a:effectRef>
+          <a:fontRef idx="minor">
+            <a:schemeClr val="lt1"/>
+          </a:fontRef>
+        </p:style>
+        <p:txBody>
+          <a:bodyPr rtlCol="0" anchor="ctr"/>
+          <a:lstStyle/>
+          <a:p>
+            <a:pPr algn="ctr"/>
+          </a:p>
+        </p:txBody>
+      </p:sp>
+      <p:sp>
+        <p:nvSpPr>
+          <p:cNvPr id="7" name="Rectangle 6"/>
+          <p:cNvSpPr/>
+          <p:nvPr/>
+        </p:nvSpPr>
+        <p:spPr>
+          <a:xfrm>
+            <a:off x="713232" y="1664208"/>
+            <a:ext cx="64008" cy="1298448"/>
+          </a:xfrm>
+          <a:prstGeom prst="rect">
+            <a:avLst/>
+          </a:prstGeom>
+          <a:solidFill>
+            <a:srgbClr val="22D3EE"/>
+          </a:solidFill>
+          <a:ln>
+            <a:solidFill>
+              <a:srgbClr val="22D3EE"/>
+            </a:solidFill>
+          </a:ln>
+        </p:spPr>
+        <p:style>
+          <a:lnRef idx="1">
+            <a:schemeClr val="accent1"/>
+          </a:lnRef>
+          <a:fillRef idx="3">
+            <a:schemeClr val="accent1"/>
+          </a:fillRef>
+          <a:effectRef idx="2">
+            <a:schemeClr val="accent1"/>
+          </a:effectRef>
+          <a:fontRef idx="minor">
+            <a:schemeClr val="lt1"/>
+          </a:fontRef>
+        </p:style>
+        <p:txBody>
+          <a:bodyPr rtlCol="0" anchor="ctr"/>
+          <a:lstStyle/>
+          <a:p>
+            <a:pPr algn="ctr"/>
+          </a:p>
+        </p:txBody>
+      </p:sp>
+      <p:sp>
+        <p:nvSpPr>
+          <p:cNvPr id="8" name="TextBox 7"/>
+          <p:cNvSpPr txBox="1"/>
+          <p:nvPr/>
+        </p:nvSpPr>
+        <p:spPr>
+          <a:xfrm>
+            <a:off x="969264" y="1828800"/>
+            <a:ext cx="3017520" cy="274320"/>
+          </a:xfrm>
+          <a:prstGeom prst="rect">
+            <a:avLst/>
+          </a:prstGeom>
+          <a:noFill/>
+        </p:spPr>
+        <p:txBody>
+          <a:bodyPr wrap="square" lIns="0" rIns="0" tIns="0" bIns="0" anchor="t">
+            <a:spAutoFit/>
+          </a:bodyPr>
+          <a:lstStyle/>
+          <a:p>
+            <a:pPr algn="l">
+              <a:lnSpc>
+                <a:spcPct val="100000"/>
+              </a:lnSpc>
+            </a:pPr>
+            <a:r>
+              <a:rPr sz="1200" b="1">
+                <a:solidFill>
+                  <a:srgbClr val="22D3EE"/>
+                </a:solidFill>
+                <a:latin typeface="Arial"/>
+              </a:rPr>
+              <a:t>ПОДЕЛИТЬСЯ</a:t>
+            </a:r>
+          </a:p>
+        </p:txBody>
+      </p:sp>
+      <p:sp>
+        <p:nvSpPr>
+          <p:cNvPr id="9" name="TextBox 8"/>
+          <p:cNvSpPr txBox="1"/>
+          <p:nvPr/>
+        </p:nvSpPr>
+        <p:spPr>
+          <a:xfrm>
+            <a:off x="969264" y="2194560"/>
+            <a:ext cx="2962656" cy="685800"/>
+          </a:xfrm>
+          <a:prstGeom prst="rect">
+            <a:avLst/>
+          </a:prstGeom>
+          <a:noFill/>
+        </p:spPr>
+        <p:txBody>
+          <a:bodyPr wrap="square" lIns="0" rIns="0" tIns="0" bIns="0" anchor="t">
+            <a:spAutoFit/>
+          </a:bodyPr>
+          <a:lstStyle/>
+          <a:p>
+            <a:pPr algn="l">
+              <a:lnSpc>
+                <a:spcPct val="105000"/>
+              </a:lnSpc>
+            </a:pPr>
+            <a:r>
+              <a:rPr sz="1500" b="1">
+                <a:solidFill>
+                  <a:srgbClr val="F8FAFC"/>
+                </a:solidFill>
+                <a:latin typeface="Arial"/>
+              </a:rPr>
+              <a:t>Публичная ссылка или приватный токен — на видео и на весь курс</a:t>
+            </a:r>
+          </a:p>
+        </p:txBody>
+      </p:sp>
+      <p:sp>
+        <p:nvSpPr>
+          <p:cNvPr id="10" name="Rounded Rectangle 9"/>
+          <p:cNvSpPr/>
+          <p:nvPr/>
+        </p:nvSpPr>
+        <p:spPr>
+          <a:xfrm>
+            <a:off x="4489704" y="1664208"/>
+            <a:ext cx="3456432" cy="1298448"/>
+          </a:xfrm>
+          <a:prstGeom prst="roundRect">
+            <a:avLst>
+              <a:gd name="adj" fmla="val 12000"/>
+            </a:avLst>
+          </a:prstGeom>
+          <a:solidFill>
+            <a:srgbClr val="121826"/>
+          </a:solidFill>
+          <a:ln>
+            <a:solidFill>
+              <a:srgbClr val="192032"/>
+            </a:solidFill>
+          </a:ln>
+        </p:spPr>
+        <p:style>
+          <a:lnRef idx="1">
+            <a:schemeClr val="accent1"/>
+          </a:lnRef>
+          <a:fillRef idx="3">
+            <a:schemeClr val="accent1"/>
+          </a:fillRef>
+          <a:effectRef idx="2">
+            <a:schemeClr val="accent1"/>
+          </a:effectRef>
+          <a:fontRef idx="minor">
+            <a:schemeClr val="lt1"/>
+          </a:fontRef>
+        </p:style>
+        <p:txBody>
+          <a:bodyPr rtlCol="0" anchor="ctr"/>
+          <a:lstStyle/>
+          <a:p>
+            <a:pPr algn="ctr"/>
+          </a:p>
+        </p:txBody>
+      </p:sp>
+      <p:sp>
+        <p:nvSpPr>
+          <p:cNvPr id="11" name="Rectangle 10"/>
+          <p:cNvSpPr/>
+          <p:nvPr/>
+        </p:nvSpPr>
+        <p:spPr>
+          <a:xfrm>
+            <a:off x="4489704" y="1664208"/>
+            <a:ext cx="64008" cy="1298448"/>
+          </a:xfrm>
+          <a:prstGeom prst="rect">
+            <a:avLst/>
+          </a:prstGeom>
+          <a:solidFill>
+            <a:srgbClr val="A78BFA"/>
+          </a:solidFill>
+          <a:ln>
+            <a:solidFill>
+              <a:srgbClr val="A78BFA"/>
+            </a:solidFill>
+          </a:ln>
+        </p:spPr>
+        <p:style>
+          <a:lnRef idx="1">
+            <a:schemeClr val="accent1"/>
+          </a:lnRef>
+          <a:fillRef idx="3">
+            <a:schemeClr val="accent1"/>
+          </a:fillRef>
+          <a:effectRef idx="2">
+            <a:schemeClr val="accent1"/>
+          </a:effectRef>
+          <a:fontRef idx="minor">
+            <a:schemeClr val="lt1"/>
+          </a:fontRef>
+        </p:style>
+        <p:txBody>
+          <a:bodyPr rtlCol="0" anchor="ctr"/>
+          <a:lstStyle/>
+          <a:p>
+            <a:pPr algn="ctr"/>
+          </a:p>
+        </p:txBody>
+      </p:sp>
+      <p:sp>
+        <p:nvSpPr>
+          <p:cNvPr id="12" name="TextBox 11"/>
+          <p:cNvSpPr txBox="1"/>
+          <p:nvPr/>
+        </p:nvSpPr>
+        <p:spPr>
+          <a:xfrm>
+            <a:off x="4745736" y="1828800"/>
+            <a:ext cx="3017520" cy="274320"/>
+          </a:xfrm>
+          <a:prstGeom prst="rect">
+            <a:avLst/>
+          </a:prstGeom>
+          <a:noFill/>
+        </p:spPr>
+        <p:txBody>
+          <a:bodyPr wrap="square" lIns="0" rIns="0" tIns="0" bIns="0" anchor="t">
+            <a:spAutoFit/>
+          </a:bodyPr>
+          <a:lstStyle/>
+          <a:p>
+            <a:pPr algn="l">
+              <a:lnSpc>
+                <a:spcPct val="100000"/>
+              </a:lnSpc>
+            </a:pPr>
+            <a:r>
+              <a:rPr sz="1200" b="1">
+                <a:solidFill>
+                  <a:srgbClr val="A78BFA"/>
+                </a:solidFill>
+                <a:latin typeface="Arial"/>
+              </a:rPr>
+              <a:t>ШПАРГАЛКА</a:t>
+            </a:r>
+          </a:p>
+        </p:txBody>
+      </p:sp>
+      <p:sp>
+        <p:nvSpPr>
+          <p:cNvPr id="13" name="TextBox 12"/>
+          <p:cNvSpPr txBox="1"/>
+          <p:nvPr/>
+        </p:nvSpPr>
+        <p:spPr>
+          <a:xfrm>
+            <a:off x="4745736" y="2194560"/>
+            <a:ext cx="2962656" cy="685800"/>
+          </a:xfrm>
+          <a:prstGeom prst="rect">
+            <a:avLst/>
+          </a:prstGeom>
+          <a:noFill/>
+        </p:spPr>
+        <p:txBody>
+          <a:bodyPr wrap="square" lIns="0" rIns="0" tIns="0" bIns="0" anchor="t">
+            <a:spAutoFit/>
+          </a:bodyPr>
+          <a:lstStyle/>
+          <a:p>
+            <a:pPr algn="l">
+              <a:lnSpc>
+                <a:spcPct val="105000"/>
+              </a:lnSpc>
+            </a:pPr>
+            <a:r>
+              <a:rPr sz="1500" b="1">
+                <a:solidFill>
+                  <a:srgbClr val="F8FAFC"/>
+                </a:solidFill>
+                <a:latin typeface="Arial"/>
+              </a:rPr>
+              <a:t>Билеты, определения и формулы по группе — из готовых конспектов</a:t>
+            </a:r>
+          </a:p>
+        </p:txBody>
+      </p:sp>
+      <p:sp>
+        <p:nvSpPr>
+          <p:cNvPr id="14" name="Rounded Rectangle 13"/>
+          <p:cNvSpPr/>
+          <p:nvPr/>
+        </p:nvSpPr>
+        <p:spPr>
+          <a:xfrm>
+            <a:off x="8266175" y="1664208"/>
+            <a:ext cx="3456432" cy="1298448"/>
+          </a:xfrm>
+          <a:prstGeom prst="roundRect">
+            <a:avLst>
+              <a:gd name="adj" fmla="val 12000"/>
+            </a:avLst>
+          </a:prstGeom>
+          <a:solidFill>
+            <a:srgbClr val="121826"/>
+          </a:solidFill>
+          <a:ln>
+            <a:solidFill>
+              <a:srgbClr val="192032"/>
+            </a:solidFill>
+          </a:ln>
+        </p:spPr>
+        <p:style>
+          <a:lnRef idx="1">
+            <a:schemeClr val="accent1"/>
+          </a:lnRef>
+          <a:fillRef idx="3">
+            <a:schemeClr val="accent1"/>
+          </a:fillRef>
+          <a:effectRef idx="2">
+            <a:schemeClr val="accent1"/>
+          </a:effectRef>
+          <a:fontRef idx="minor">
+            <a:schemeClr val="lt1"/>
+          </a:fontRef>
+        </p:style>
+        <p:txBody>
+          <a:bodyPr rtlCol="0" anchor="ctr"/>
+          <a:lstStyle/>
+          <a:p>
+            <a:pPr algn="ctr"/>
+          </a:p>
+        </p:txBody>
+      </p:sp>
+      <p:sp>
+        <p:nvSpPr>
+          <p:cNvPr id="15" name="Rectangle 14"/>
+          <p:cNvSpPr/>
+          <p:nvPr/>
+        </p:nvSpPr>
+        <p:spPr>
+          <a:xfrm>
+            <a:off x="8266175" y="1664208"/>
+            <a:ext cx="64008" cy="1298448"/>
+          </a:xfrm>
+          <a:prstGeom prst="rect">
+            <a:avLst/>
+          </a:prstGeom>
+          <a:solidFill>
+            <a:srgbClr val="34D399"/>
+          </a:solidFill>
+          <a:ln>
+            <a:solidFill>
+              <a:srgbClr val="34D399"/>
+            </a:solidFill>
+          </a:ln>
+        </p:spPr>
+        <p:style>
+          <a:lnRef idx="1">
+            <a:schemeClr val="accent1"/>
+          </a:lnRef>
+          <a:fillRef idx="3">
+            <a:schemeClr val="accent1"/>
+          </a:fillRef>
+          <a:effectRef idx="2">
+            <a:schemeClr val="accent1"/>
+          </a:effectRef>
+          <a:fontRef idx="minor">
+            <a:schemeClr val="lt1"/>
+          </a:fontRef>
+        </p:style>
+        <p:txBody>
+          <a:bodyPr rtlCol="0" anchor="ctr"/>
+          <a:lstStyle/>
+          <a:p>
+            <a:pPr algn="ctr"/>
+          </a:p>
+        </p:txBody>
+      </p:sp>
+      <p:sp>
+        <p:nvSpPr>
+          <p:cNvPr id="16" name="TextBox 15"/>
+          <p:cNvSpPr txBox="1"/>
+          <p:nvPr/>
+        </p:nvSpPr>
+        <p:spPr>
+          <a:xfrm>
+            <a:off x="8522207" y="1828800"/>
+            <a:ext cx="3017520" cy="274320"/>
+          </a:xfrm>
+          <a:prstGeom prst="rect">
+            <a:avLst/>
+          </a:prstGeom>
+          <a:noFill/>
+        </p:spPr>
+        <p:txBody>
+          <a:bodyPr wrap="square" lIns="0" rIns="0" tIns="0" bIns="0" anchor="t">
+            <a:spAutoFit/>
+          </a:bodyPr>
+          <a:lstStyle/>
+          <a:p>
+            <a:pPr algn="l">
+              <a:lnSpc>
+                <a:spcPct val="100000"/>
+              </a:lnSpc>
+            </a:pPr>
+            <a:r>
+              <a:rPr sz="1200" b="1">
+                <a:solidFill>
+                  <a:srgbClr val="34D399"/>
+                </a:solidFill>
+                <a:latin typeface="Arial"/>
+              </a:rPr>
+              <a:t>АККАУНТ</a:t>
+            </a:r>
+          </a:p>
+        </p:txBody>
+      </p:sp>
+      <p:sp>
+        <p:nvSpPr>
+          <p:cNvPr id="17" name="TextBox 16"/>
+          <p:cNvSpPr txBox="1"/>
+          <p:nvPr/>
+        </p:nvSpPr>
+        <p:spPr>
+          <a:xfrm>
+            <a:off x="8522207" y="2194560"/>
+            <a:ext cx="2962656" cy="685800"/>
+          </a:xfrm>
+          <a:prstGeom prst="rect">
+            <a:avLst/>
+          </a:prstGeom>
+          <a:noFill/>
+        </p:spPr>
+        <p:txBody>
+          <a:bodyPr wrap="square" lIns="0" rIns="0" tIns="0" bIns="0" anchor="t">
+            <a:spAutoFit/>
+          </a:bodyPr>
+          <a:lstStyle/>
+          <a:p>
+            <a:pPr algn="l">
+              <a:lnSpc>
+                <a:spcPct val="105000"/>
+              </a:lnSpc>
+            </a:pPr>
+            <a:r>
+              <a:rPr sz="1500" b="1">
+                <a:solidFill>
+                  <a:srgbClr val="F8FAFC"/>
+                </a:solidFill>
+                <a:latin typeface="Arial"/>
+              </a:rPr>
+              <a:t>Имя, пароль и завершение сессии — в настройках профиля</a:t>
+            </a:r>
+          </a:p>
+        </p:txBody>
+      </p:sp>
+      <p:pic>
+        <p:nvPicPr>
+          <p:cNvPr id="18" name="Picture 17" descr="09-share-dialog.png"/>
+          <p:cNvPicPr>
+            <a:picLocks noChangeAspect="1"/>
+          </p:cNvPicPr>
+          <p:nvPr/>
+        </p:nvPicPr>
+        <p:blipFill>
+          <a:blip r:embed="rId2"/>
+          <a:stretch>
+            <a:fillRect/>
+          </a:stretch>
+        </p:blipFill>
+        <p:spPr>
+          <a:xfrm>
+            <a:off x="713232" y="3163824"/>
+            <a:ext cx="3374136" cy="2112264"/>
+          </a:xfrm>
+          <a:prstGeom prst="rect">
+            <a:avLst/>
+          </a:prstGeom>
+        </p:spPr>
+      </p:pic>
+      <p:sp>
+        <p:nvSpPr>
+          <p:cNvPr id="19" name="Rounded Rectangle 18"/>
+          <p:cNvSpPr/>
+          <p:nvPr/>
+        </p:nvSpPr>
+        <p:spPr>
+          <a:xfrm>
+            <a:off x="768096" y="5376672"/>
+            <a:ext cx="2084831" cy="365760"/>
+          </a:xfrm>
+          <a:prstGeom prst="roundRect">
+            <a:avLst>
+              <a:gd name="adj" fmla="val 12000"/>
+            </a:avLst>
+          </a:prstGeom>
+          <a:solidFill>
+            <a:srgbClr val="7C3AED"/>
+          </a:solidFill>
+          <a:ln>
+            <a:solidFill>
+              <a:srgbClr val="7C3AED"/>
+            </a:solidFill>
+          </a:ln>
+        </p:spPr>
+        <p:style>
+          <a:lnRef idx="1">
+            <a:schemeClr val="accent1"/>
+          </a:lnRef>
+          <a:fillRef idx="3">
+            <a:schemeClr val="accent1"/>
+          </a:fillRef>
+          <a:effectRef idx="2">
+            <a:schemeClr val="accent1"/>
+          </a:effectRef>
+          <a:fontRef idx="minor">
+            <a:schemeClr val="lt1"/>
+          </a:fontRef>
+        </p:style>
+        <p:txBody>
+          <a:bodyPr rtlCol="0" anchor="ctr"/>
+          <a:lstStyle/>
+          <a:p>
+            <a:pPr algn="ctr"/>
+          </a:p>
+        </p:txBody>
+      </p:sp>
+      <p:sp>
+        <p:nvSpPr>
+          <p:cNvPr id="20" name="TextBox 19"/>
+          <p:cNvSpPr txBox="1"/>
+          <p:nvPr/>
+        </p:nvSpPr>
+        <p:spPr>
+          <a:xfrm>
+            <a:off x="768096" y="5390388"/>
+            <a:ext cx="2084831" cy="310896"/>
+          </a:xfrm>
+          <a:prstGeom prst="rect">
+            <a:avLst/>
+          </a:prstGeom>
+          <a:noFill/>
+        </p:spPr>
+        <p:txBody>
+          <a:bodyPr wrap="square" lIns="0" rIns="0" tIns="0" bIns="0" anchor="ctr">
+            <a:spAutoFit/>
+          </a:bodyPr>
+          <a:lstStyle/>
+          <a:p>
+            <a:pPr algn="ctr">
+              <a:lnSpc>
+                <a:spcPct val="100000"/>
+              </a:lnSpc>
+            </a:pPr>
+            <a:r>
+              <a:rPr sz="1200" b="1">
+                <a:solidFill>
+                  <a:srgbClr val="F8FAFC"/>
+                </a:solidFill>
+                <a:latin typeface="Arial"/>
+              </a:rPr>
+              <a:t>Поделиться ссылкой</a:t>
+            </a:r>
+          </a:p>
+        </p:txBody>
+      </p:sp>
+      <p:pic>
+        <p:nvPicPr>
+          <p:cNvPr id="21" name="Picture 20" descr="08-exam-sheet.png"/>
+          <p:cNvPicPr>
+            <a:picLocks noChangeAspect="1"/>
+          </p:cNvPicPr>
+          <p:nvPr/>
+        </p:nvPicPr>
+        <p:blipFill>
+          <a:blip r:embed="rId3"/>
+          <a:stretch>
+            <a:fillRect/>
+          </a:stretch>
+        </p:blipFill>
+        <p:spPr>
+          <a:xfrm>
+            <a:off x="4407408" y="3163824"/>
+            <a:ext cx="3374136" cy="2112264"/>
+          </a:xfrm>
+          <a:prstGeom prst="rect">
+            <a:avLst/>
+          </a:prstGeom>
+        </p:spPr>
+      </p:pic>
+      <p:sp>
+        <p:nvSpPr>
+          <p:cNvPr id="22" name="Rounded Rectangle 21"/>
+          <p:cNvSpPr/>
+          <p:nvPr/>
+        </p:nvSpPr>
+        <p:spPr>
+          <a:xfrm>
+            <a:off x="4462272" y="5376672"/>
+            <a:ext cx="2084831" cy="365760"/>
+          </a:xfrm>
+          <a:prstGeom prst="roundRect">
+            <a:avLst>
+              <a:gd name="adj" fmla="val 12000"/>
+            </a:avLst>
+          </a:prstGeom>
+          <a:solidFill>
+            <a:srgbClr val="7C3AED"/>
+          </a:solidFill>
+          <a:ln>
+            <a:solidFill>
+              <a:srgbClr val="7C3AED"/>
+            </a:solidFill>
+          </a:ln>
+        </p:spPr>
+        <p:style>
+          <a:lnRef idx="1">
+            <a:schemeClr val="accent1"/>
+          </a:lnRef>
+          <a:fillRef idx="3">
+            <a:schemeClr val="accent1"/>
+          </a:fillRef>
+          <a:effectRef idx="2">
+            <a:schemeClr val="accent1"/>
+          </a:effectRef>
+          <a:fontRef idx="minor">
+            <a:schemeClr val="lt1"/>
+          </a:fontRef>
+        </p:style>
+        <p:txBody>
+          <a:bodyPr rtlCol="0" anchor="ctr"/>
+          <a:lstStyle/>
+          <a:p>
+            <a:pPr algn="ctr"/>
+          </a:p>
+        </p:txBody>
+      </p:sp>
+      <p:sp>
+        <p:nvSpPr>
+          <p:cNvPr id="23" name="TextBox 22"/>
+          <p:cNvSpPr txBox="1"/>
+          <p:nvPr/>
+        </p:nvSpPr>
+        <p:spPr>
+          <a:xfrm>
+            <a:off x="4462272" y="5390388"/>
+            <a:ext cx="2084831" cy="310896"/>
+          </a:xfrm>
+          <a:prstGeom prst="rect">
+            <a:avLst/>
+          </a:prstGeom>
+          <a:noFill/>
+        </p:spPr>
+        <p:txBody>
+          <a:bodyPr wrap="square" lIns="0" rIns="0" tIns="0" bIns="0" anchor="ctr">
+            <a:spAutoFit/>
+          </a:bodyPr>
+          <a:lstStyle/>
+          <a:p>
+            <a:pPr algn="ctr">
+              <a:lnSpc>
+                <a:spcPct val="100000"/>
+              </a:lnSpc>
+            </a:pPr>
+            <a:r>
+              <a:rPr sz="1200" b="1">
+                <a:solidFill>
+                  <a:srgbClr val="F8FAFC"/>
+                </a:solidFill>
+                <a:latin typeface="Arial"/>
+              </a:rPr>
+              <a:t>Шпаргалка к экзамену</a:t>
+            </a:r>
+          </a:p>
+        </p:txBody>
+      </p:sp>
+      <p:pic>
+        <p:nvPicPr>
+          <p:cNvPr id="24" name="Picture 23" descr="07-account-settings.png"/>
+          <p:cNvPicPr>
+            <a:picLocks noChangeAspect="1"/>
+          </p:cNvPicPr>
+          <p:nvPr/>
+        </p:nvPicPr>
+        <p:blipFill>
+          <a:blip r:embed="rId4"/>
+          <a:stretch>
+            <a:fillRect/>
+          </a:stretch>
+        </p:blipFill>
+        <p:spPr>
+          <a:xfrm>
+            <a:off x="8101583" y="3163824"/>
+            <a:ext cx="3374136" cy="2112264"/>
+          </a:xfrm>
+          <a:prstGeom prst="rect">
+            <a:avLst/>
+          </a:prstGeom>
+        </p:spPr>
+      </p:pic>
+      <p:sp>
+        <p:nvSpPr>
+          <p:cNvPr id="25" name="Rounded Rectangle 24"/>
+          <p:cNvSpPr/>
+          <p:nvPr/>
+        </p:nvSpPr>
+        <p:spPr>
+          <a:xfrm>
+            <a:off x="8156448" y="5376672"/>
+            <a:ext cx="2084831" cy="365760"/>
+          </a:xfrm>
+          <a:prstGeom prst="roundRect">
+            <a:avLst>
+              <a:gd name="adj" fmla="val 12000"/>
+            </a:avLst>
+          </a:prstGeom>
+          <a:solidFill>
+            <a:srgbClr val="22D3EE"/>
+          </a:solidFill>
+          <a:ln>
+            <a:solidFill>
+              <a:srgbClr val="22D3EE"/>
+            </a:solidFill>
+          </a:ln>
+        </p:spPr>
+        <p:style>
+          <a:lnRef idx="1">
+            <a:schemeClr val="accent1"/>
+          </a:lnRef>
+          <a:fillRef idx="3">
+            <a:schemeClr val="accent1"/>
+          </a:fillRef>
+          <a:effectRef idx="2">
+            <a:schemeClr val="accent1"/>
+          </a:effectRef>
+          <a:fontRef idx="minor">
+            <a:schemeClr val="lt1"/>
+          </a:fontRef>
+        </p:style>
+        <p:txBody>
+          <a:bodyPr rtlCol="0" anchor="ctr"/>
+          <a:lstStyle/>
+          <a:p>
+            <a:pPr algn="ctr"/>
+          </a:p>
+        </p:txBody>
+      </p:sp>
+      <p:sp>
+        <p:nvSpPr>
+          <p:cNvPr id="26" name="TextBox 25"/>
+          <p:cNvSpPr txBox="1"/>
+          <p:nvPr/>
+        </p:nvSpPr>
+        <p:spPr>
+          <a:xfrm>
+            <a:off x="8156448" y="5390388"/>
+            <a:ext cx="2084831" cy="310896"/>
+          </a:xfrm>
+          <a:prstGeom prst="rect">
+            <a:avLst/>
+          </a:prstGeom>
+          <a:noFill/>
+        </p:spPr>
+        <p:txBody>
+          <a:bodyPr wrap="square" lIns="0" rIns="0" tIns="0" bIns="0" anchor="ctr">
+            <a:spAutoFit/>
+          </a:bodyPr>
+          <a:lstStyle/>
+          <a:p>
+            <a:pPr algn="ctr">
+              <a:lnSpc>
+                <a:spcPct val="100000"/>
+              </a:lnSpc>
+            </a:pPr>
+            <a:r>
+              <a:rPr sz="1200" b="1">
+                <a:solidFill>
+                  <a:srgbClr val="080B12"/>
+                </a:solidFill>
+                <a:latin typeface="Arial"/>
+              </a:rPr>
+              <a:t>Настройки аккаунта</a:t>
+            </a:r>
+          </a:p>
+        </p:txBody>
+      </p:sp>
+      <p:sp>
+        <p:nvSpPr>
+          <p:cNvPr id="27" name="TextBox 26"/>
+          <p:cNvSpPr txBox="1"/>
+          <p:nvPr/>
+        </p:nvSpPr>
+        <p:spPr>
+          <a:xfrm>
+            <a:off x="731520" y="5907024"/>
+            <a:ext cx="10424160" cy="384048"/>
+          </a:xfrm>
+          <a:prstGeom prst="rect">
+            <a:avLst/>
+          </a:prstGeom>
+          <a:noFill/>
+        </p:spPr>
+        <p:txBody>
+          <a:bodyPr wrap="square" lIns="0" rIns="0" tIns="0" bIns="0" anchor="t">
+            <a:spAutoFit/>
+          </a:bodyPr>
+          <a:lstStyle/>
+          <a:p>
+            <a:pPr algn="l">
+              <a:lnSpc>
+                <a:spcPct val="100000"/>
+              </a:lnSpc>
+            </a:pPr>
+            <a:r>
+              <a:rPr sz="1800" b="1">
+                <a:solidFill>
+                  <a:srgbClr val="A78BFA"/>
+                </a:solidFill>
+                <a:latin typeface="Arial"/>
+              </a:rPr>
+              <a:t>Публичные и приватные ссылки не раскрывают личную библиотеку</a:t>
+            </a:r>
+          </a:p>
+        </p:txBody>
+      </p:sp>
+    </p:spTree>
+  </p:cSld>
+  <p:clrMapOvr>
+    <a:masterClrMapping/>
+  </p:clrMapOvr>
+</p:sld>
+</file>
+
+<file path=ppt/slides/slide8.xml><?xml version="1.0" encoding="utf-8"?>
+<p:sld xmlns:a="http://schemas.openxmlformats.org/drawingml/2006/main" xmlns:p="http://schemas.openxmlformats.org/presentationml/2006/main" xmlns:r="http://schemas.openxmlformats.org/officeDocument/2006/relationships">
+  <p:cSld>
+    <p:bg>
+      <p:bgPr>
+        <a:solidFill>
+          <a:srgbClr val="080B12"/>
+        </a:solidFill>
+        <a:effectLst/>
+      </p:bgPr>
+    </p:bg>
+    <p:spTree>
+      <p:nvGrpSpPr>
+        <p:cNvPr id="1" name=""/>
+        <p:cNvGrpSpPr/>
+        <p:nvPr/>
+      </p:nvGrpSpPr>
+      <p:grpSpPr/>
+      <p:sp>
+        <p:nvSpPr>
+          <p:cNvPr id="2" name="TextBox 1"/>
+          <p:cNvSpPr txBox="1"/>
+          <p:nvPr/>
+        </p:nvSpPr>
+        <p:spPr>
+          <a:xfrm>
+            <a:off x="658368" y="310896"/>
+            <a:ext cx="5029200" cy="256032"/>
+          </a:xfrm>
+          <a:prstGeom prst="rect">
+            <a:avLst/>
+          </a:prstGeom>
+          <a:noFill/>
+        </p:spPr>
+        <p:txBody>
+          <a:bodyPr wrap="square" lIns="0" rIns="0" tIns="0" bIns="0" anchor="t">
+            <a:spAutoFit/>
+          </a:bodyPr>
+          <a:lstStyle/>
+          <a:p>
+            <a:pPr algn="l">
+              <a:lnSpc>
+                <a:spcPct val="100000"/>
+              </a:lnSpc>
+            </a:pPr>
+            <a:r>
+              <a:rPr sz="1000" b="1">
+                <a:solidFill>
+                  <a:srgbClr val="22D3EE"/>
+                </a:solidFill>
+                <a:latin typeface="Arial"/>
+              </a:rPr>
+              <a:t>ИТОГ · 20 СЕКУНД</a:t>
+            </a:r>
+          </a:p>
+        </p:txBody>
+      </p:sp>
+      <p:sp>
+        <p:nvSpPr>
+          <p:cNvPr id="3" name="TextBox 2"/>
+          <p:cNvSpPr txBox="1"/>
+          <p:nvPr/>
+        </p:nvSpPr>
+        <p:spPr>
+          <a:xfrm>
+            <a:off x="658368" y="603504"/>
+            <a:ext cx="10149840" cy="932688"/>
+          </a:xfrm>
+          <a:prstGeom prst="rect">
+            <a:avLst/>
+          </a:prstGeom>
+          <a:noFill/>
+        </p:spPr>
+        <p:txBody>
+          <a:bodyPr wrap="square" lIns="0" rIns="0" tIns="0" bIns="0" anchor="t">
+            <a:spAutoFit/>
+          </a:bodyPr>
+          <a:lstStyle/>
+          <a:p>
+            <a:pPr algn="l">
+              <a:lnSpc>
+                <a:spcPct val="100000"/>
+              </a:lnSpc>
+            </a:pPr>
+            <a:r>
+              <a:rPr sz="2800" b="1">
+                <a:solidFill>
+                  <a:srgbClr val="F8FAFC"/>
+                </a:solidFill>
+                <a:latin typeface="Arial"/>
+              </a:rPr>
+              <a:t>Lectora готова к пилоту и масштабированию после хакатона</a:t>
+            </a:r>
+          </a:p>
+        </p:txBody>
+      </p:sp>
+      <p:sp>
+        <p:nvSpPr>
+          <p:cNvPr id="4" name="Rectangle 3"/>
+          <p:cNvSpPr/>
+          <p:nvPr/>
+        </p:nvSpPr>
+        <p:spPr>
+          <a:xfrm>
+            <a:off x="658368" y="1444752"/>
+            <a:ext cx="621792" cy="50292"/>
+          </a:xfrm>
+          <a:prstGeom prst="rect">
+            <a:avLst/>
+          </a:prstGeom>
+          <a:solidFill>
+            <a:srgbClr val="7C3AED"/>
+          </a:solidFill>
+          <a:ln>
+            <a:solidFill>
+              <a:srgbClr val="7C3AED"/>
+            </a:solidFill>
+          </a:ln>
+        </p:spPr>
+        <p:style>
+          <a:lnRef idx="1">
+            <a:schemeClr val="accent1"/>
+          </a:lnRef>
+          <a:fillRef idx="3">
+            <a:schemeClr val="accent1"/>
+          </a:fillRef>
+          <a:effectRef idx="2">
+            <a:schemeClr val="accent1"/>
+          </a:effectRef>
+          <a:fontRef idx="minor">
+            <a:schemeClr val="lt1"/>
+          </a:fontRef>
+        </p:style>
+        <p:txBody>
+          <a:bodyPr rtlCol="0" anchor="ctr"/>
+          <a:lstStyle/>
+          <a:p>
+            <a:pPr algn="ctr"/>
+          </a:p>
+        </p:txBody>
+      </p:sp>
+      <p:sp>
+        <p:nvSpPr>
+          <p:cNvPr id="5" name="TextBox 4"/>
+          <p:cNvSpPr txBox="1"/>
+          <p:nvPr/>
+        </p:nvSpPr>
+        <p:spPr>
+          <a:xfrm>
+            <a:off x="11018520" y="320040"/>
+            <a:ext cx="457200" cy="274320"/>
+          </a:xfrm>
+          <a:prstGeom prst="rect">
+            <a:avLst/>
+          </a:prstGeom>
+          <a:noFill/>
+        </p:spPr>
+        <p:txBody>
+          <a:bodyPr wrap="square" lIns="0" rIns="0" tIns="0" bIns="0" anchor="t">
+            <a:spAutoFit/>
+          </a:bodyPr>
+          <a:lstStyle/>
+          <a:p>
+            <a:pPr algn="r">
+              <a:lnSpc>
+                <a:spcPct val="100000"/>
+              </a:lnSpc>
+            </a:pPr>
+            <a:r>
+              <a:rPr sz="1000" b="1">
+                <a:solidFill>
+                  <a:srgbClr val="94A3B8"/>
+                </a:solidFill>
+                <a:latin typeface="Arial"/>
+              </a:rPr>
+              <a:t>08</a:t>
             </a:r>
           </a:p>
         </p:txBody>

--- a/docs/presentation/lectora-hackathon-defense.pptx
+++ b/docs/presentation/lectora-hackathon-defense.pptx
@@ -12,7 +12,6 @@
     <p:sldId id="260" r:id="rId12"/>
     <p:sldId id="261" r:id="rId13"/>
     <p:sldId id="262" r:id="rId14"/>
-    <p:sldId id="263" r:id="rId15"/>
   </p:sldIdLst>
   <p:sldSz cx="12191695" cy="6858000" type="screen4x3"/>
   <p:notesSz cx="6858000" cy="9144000"/>
@@ -509,7 +508,7 @@
           <a:lstStyle/>
           <a:p>
             <a:r>
-              <a:t>Здравствуйте! Мы — команда TeamMentality. Представляем Lectora: платформу, которая превращает обычное видео в структурированный, доступный для поиска и перевода источник знаний. За пять минут покажем проблему, решение, техническую основу и уже работающий MVP.</a:t>
+              <a:t>Здравствуйте! Мы — команда TeamMentality. Lectora превращает видео в знания: находит нужный момент по смыслу, делает конспект, перевод, субтитры и озвучку.</a:t>
             </a:r>
           </a:p>
         </p:txBody>
@@ -649,7 +648,7 @@
           <a:lstStyle/>
           <a:p>
             <a:r>
-              <a:t>Lectora собирает весь путь в одном интерфейсе. Пользователь загружает файл или ссылку, получает транскрипт с таймкодами, ищет не по точному слову, а по смыслу, формирует конспект, перевод и озвучку. Результат хранится в личной библиотеке, группируется и при необходимости открывается другим по ссылке.</a:t>
+              <a:t>Lectora собирает весь путь в одном интерфейсе. Пользователь загружает файл или ссылку, получает транскрипт с таймкодами, ищет не по точному слову, а по смыслу, формирует конспект, перевод и озвучку. Результат хранится в личной библиотеке: видео можно добавить в группу, открыть по публичной или приватной ссылке и собрать по конспектам шпаргалку к экзамену.</a:t>
             </a:r>
           </a:p>
         </p:txBody>
@@ -859,7 +858,7 @@
           <a:lstStyle/>
           <a:p>
             <a:r>
-              <a:t>Главное отличие Lectora — не отдельная AI-функция, а цельный сценарий. Семантический поиск ведёт прямо к моменту. Локальный и облачный режимы дают выбор между приватностью и качеством. Группы можно открывать по публичной или приватной ссылке. А мультиязычность делает одну запись полезной для более широкой аудитории.</a:t>
+              <a:t>Главное отличие Lectora — не отдельная AI-функция, а цельный сценарий. Семантический поиск сразу ведёт к нужному моменту, а не выдаёт список файлов. Локальный и облачный режимы дают выбор между приватностью и качеством. Группы, публичные и приватные ссылки и шпаргалка к экзамену из готовых конспектов делают записи материалом для учёбы. Мультиязычность с озвучкой расширяет аудиторию одной и той же лекции.</a:t>
             </a:r>
           </a:p>
         </p:txBody>
@@ -885,76 +884,6 @@
 </file>
 
 <file path=ppt/notesSlides/notesSlide7.xml><?xml version="1.0" encoding="utf-8"?>
-<p:notes xmlns:a="http://schemas.openxmlformats.org/drawingml/2006/main" xmlns:p="http://schemas.openxmlformats.org/presentationml/2006/main" xmlns:r="http://schemas.openxmlformats.org/officeDocument/2006/relationships">
-  <p:cSld>
-    <p:spTree>
-      <p:nvGrpSpPr>
-        <p:cNvPr id="1" name=""/>
-        <p:cNvGrpSpPr/>
-        <p:nvPr/>
-      </p:nvGrpSpPr>
-      <p:grpSpPr>
-        <a:xfrm>
-          <a:off x="0" y="0"/>
-          <a:ext cx="0" cy="0"/>
-          <a:chOff x="0" y="0"/>
-          <a:chExt cx="0" cy="0"/>
-        </a:xfrm>
-      </p:grpSpPr>
-      <p:sp>
-        <p:nvSpPr>
-          <p:cNvPr id="2" name="Slide Image Placeholder 1"/>
-          <p:cNvSpPr>
-            <a:spLocks noGrp="1"/>
-          </p:cNvSpPr>
-          <p:nvPr>
-            <p:ph type="sldImg" idx="2"/>
-          </p:nvPr>
-        </p:nvSpPr>
-        <p:spPr/>
-      </p:sp>
-      <p:sp>
-        <p:nvSpPr>
-          <p:cNvPr id="3" name="Notes Placeholder 2"/>
-          <p:cNvSpPr>
-            <a:spLocks noGrp="1"/>
-          </p:cNvSpPr>
-          <p:nvPr>
-            <p:ph type="body" idx="3" sz="quarter"/>
-          </p:nvPr>
-        </p:nvSpPr>
-        <p:spPr/>
-        <p:txBody>
-          <a:bodyPr/>
-          <a:lstStyle/>
-          <a:p>
-            <a:r>
-              <a:t>После MVP мы закрыли сценарии повторного использования. Видео или целый курс можно открыть по публичной либо приватной ссылке — кнопка «Поделиться» стоит там, где ссылка действительно существует. По готовым конспектам группы собирается шпаргалка к экзамену: билеты, определения и формулы со ссылками на таймкоды. А в настройках аккаунта меняются имя и пароль и завершается сессия.</a:t>
-            </a:r>
-          </a:p>
-        </p:txBody>
-      </p:sp>
-      <p:sp>
-        <p:nvSpPr>
-          <p:cNvPr id="4" name="Slide Number Placeholder 3"/>
-          <p:cNvSpPr>
-            <a:spLocks noGrp="1"/>
-          </p:cNvSpPr>
-          <p:nvPr>
-            <p:ph type="sldNum" idx="5" sz="quarter"/>
-          </p:nvPr>
-        </p:nvSpPr>
-        <p:spPr/>
-      </p:sp>
-    </p:spTree>
-  </p:cSld>
-  <p:clrMapOvr>
-    <a:masterClrMapping/>
-  </p:clrMapOvr>
-</p:notes>
-</file>
-
-<file path=ppt/notesSlides/notesSlide8.xml><?xml version="1.0" encoding="utf-8"?>
 <p:notes xmlns:a="http://schemas.openxmlformats.org/drawingml/2006/main" xmlns:p="http://schemas.openxmlformats.org/presentationml/2006/main" xmlns:r="http://schemas.openxmlformats.org/officeDocument/2006/relationships">
   <p:cSld>
     <p:spTree>
@@ -4353,7 +4282,7 @@
         </p:nvSpPr>
         <p:spPr>
           <a:xfrm>
-            <a:off x="694944" y="4572000"/>
+            <a:off x="694944" y="4498848"/>
             <a:ext cx="5303520" cy="1143000"/>
           </a:xfrm>
           <a:prstGeom prst="rect">
@@ -4394,7 +4323,46 @@
         </p:nvSpPr>
         <p:spPr>
           <a:xfrm>
-            <a:off x="694944" y="6144768"/>
+            <a:off x="694944" y="5961888"/>
+            <a:ext cx="6035040" cy="274320"/>
+          </a:xfrm>
+          <a:prstGeom prst="rect">
+            <a:avLst/>
+          </a:prstGeom>
+          <a:noFill/>
+        </p:spPr>
+        <p:txBody>
+          <a:bodyPr wrap="square" lIns="0" rIns="0" tIns="0" bIns="0" anchor="t">
+            <a:spAutoFit/>
+          </a:bodyPr>
+          <a:lstStyle/>
+          <a:p>
+            <a:pPr algn="l">
+              <a:lnSpc>
+                <a:spcPct val="100000"/>
+              </a:lnSpc>
+            </a:pPr>
+            <a:r>
+              <a:rPr sz="1100" b="1">
+                <a:solidFill>
+                  <a:srgbClr val="22D3EE"/>
+                </a:solidFill>
+                <a:latin typeface="Arial"/>
+              </a:rPr>
+              <a:t>01 · НАЗВАНИЕ ПРОЕКТА И КОМАНДА · 15 СЕКУНД</a:t>
+            </a:r>
+          </a:p>
+        </p:txBody>
+      </p:sp>
+      <p:sp>
+        <p:nvSpPr>
+          <p:cNvPr id="13" name="TextBox 12"/>
+          <p:cNvSpPr txBox="1"/>
+          <p:nvPr/>
+        </p:nvSpPr>
+        <p:spPr>
+          <a:xfrm>
+            <a:off x="694944" y="6345936"/>
             <a:ext cx="3657600" cy="274320"/>
           </a:xfrm>
           <a:prstGeom prst="rect">
@@ -5317,7 +5285,7 @@
                 </a:solidFill>
                 <a:latin typeface="Arial"/>
               </a:rPr>
-              <a:t>РЕШЕНИЕ · 45 СЕКУНД</a:t>
+              <a:t>ПРЕДЛАГАЕМОЕ РЕШЕНИЕ · 45 СЕКУНД</a:t>
             </a:r>
           </a:p>
         </p:txBody>
@@ -5356,7 +5324,7 @@
                 </a:solidFill>
                 <a:latin typeface="Arial"/>
               </a:rPr>
-              <a:t>Lectora делает каждую запись доступной для поиска и обучения</a:t>
+              <a:t>Lectora превращает запись в учебный материал</a:t>
             </a:r>
           </a:p>
         </p:txBody>
@@ -6473,7 +6441,7 @@
         </p:nvSpPr>
         <p:spPr>
           <a:xfrm>
-            <a:off x="6199632" y="4142232"/>
+            <a:off x="6199632" y="4069080"/>
             <a:ext cx="2560320" cy="365760"/>
           </a:xfrm>
           <a:prstGeom prst="rect">
@@ -6512,8 +6480,8 @@
         </p:nvSpPr>
         <p:spPr>
           <a:xfrm>
-            <a:off x="6217920" y="4599432"/>
-            <a:ext cx="4389120" cy="1078992"/>
+            <a:off x="6217920" y="4526280"/>
+            <a:ext cx="4754880" cy="1234440"/>
           </a:xfrm>
           <a:prstGeom prst="rect">
             <a:avLst/>
@@ -6528,19 +6496,20 @@
           <a:p>
             <a:pPr algn="l">
               <a:lnSpc>
-                <a:spcPct val="112000"/>
+                <a:spcPct val="110000"/>
               </a:lnSpc>
             </a:pPr>
             <a:r>
-              <a:rPr sz="1800" b="0">
+              <a:rPr sz="1600" b="0">
                 <a:solidFill>
                   <a:srgbClr val="94A3B8"/>
                 </a:solidFill>
                 <a:latin typeface="Arial"/>
               </a:rPr>
-              <a:t>Библиотека и группы
-Права доступа
-Два языка и озвучка</a:t>
+              <a:t>Библиотека, группы и права доступа
+Публичные и приватные ссылки
+Перевод, субтитры и озвучка RU ↔ EN
+Шпаргалка по конспектам группы</a:t>
             </a:r>
           </a:p>
         </p:txBody>
@@ -7873,7 +7842,7 @@
                 </a:solidFill>
                 <a:latin typeface="Arial"/>
               </a:rPr>
-              <a:t>Выбор: локальная обработка или API</a:t>
+              <a:t>Локальная обработка или API</a:t>
             </a:r>
           </a:p>
         </p:txBody>
@@ -7977,7 +7946,7 @@
                 </a:solidFill>
                 <a:latin typeface="Arial"/>
               </a:rPr>
-              <a:t>ДЕМОНСТРАЦИЯ · 60 СЕКУНД</a:t>
+              <a:t>ДЕМОНСТРАЦИЯ MVP · 60 СЕКУНД</a:t>
             </a:r>
           </a:p>
         </p:txBody>
@@ -8424,7 +8393,7 @@
                 </a:solidFill>
                 <a:latin typeface="Arial"/>
               </a:rPr>
-              <a:t>ЦЕННОСТЬ · 40 СЕКУНД</a:t>
+              <a:t>ПРЕИМУЩЕСТВА И ЦЕННОСТЬ · 40 СЕКУНД</a:t>
             </a:r>
           </a:p>
         </p:txBody>
@@ -8463,7 +8432,7 @@
                 </a:solidFill>
                 <a:latin typeface="Arial"/>
               </a:rPr>
-              <a:t>Один сервис заменяет просмотр, перевод и ручной конспект</a:t>
+              <a:t>Один сервис вместо просмотра, перевода и конспекта</a:t>
             </a:r>
           </a:p>
         </p:txBody>
@@ -9063,7 +9032,7 @@
                 </a:solidFill>
                 <a:latin typeface="Arial"/>
               </a:rPr>
-              <a:t>Группы, публичные и приватные ссылки</a:t>
+              <a:t>Группы, ссылки, шпаргалка к экзамену</a:t>
             </a:r>
           </a:p>
         </p:txBody>
@@ -9274,7 +9243,7 @@
                 </a:solidFill>
                 <a:latin typeface="Arial"/>
               </a:rPr>
-              <a:t>Практическая ценность: меньше повторной работы, больше повторного использования знаний</a:t>
+              <a:t>Меньше повторной работы — больше повторного использования знаний</a:t>
             </a:r>
           </a:p>
         </p:txBody>
@@ -9339,7 +9308,7 @@
                 </a:solidFill>
                 <a:latin typeface="Arial"/>
               </a:rPr>
-              <a:t>НОВЫЕ СЦЕНАРИИ · 30 СЕКУНД</a:t>
+              <a:t>ПЕРСПЕКТИВЫ И ИТОГ · 20 СЕКУНД</a:t>
             </a:r>
           </a:p>
         </p:txBody>
@@ -9378,7 +9347,7 @@
                 </a:solidFill>
                 <a:latin typeface="Arial"/>
               </a:rPr>
-              <a:t>Курсы, ссылки и шпаргалка превращают записи в учебный материал</a:t>
+              <a:t>Lectora готова к пилоту и масштабированию</a:t>
             </a:r>
           </a:p>
         </p:txBody>
@@ -9469,106 +9438,14 @@
       </p:sp>
       <p:sp>
         <p:nvSpPr>
-          <p:cNvPr id="6" name="Rounded Rectangle 5"/>
-          <p:cNvSpPr/>
-          <p:nvPr/>
-        </p:nvSpPr>
-        <p:spPr>
-          <a:xfrm>
-            <a:off x="713232" y="1664208"/>
-            <a:ext cx="3456432" cy="1298448"/>
-          </a:xfrm>
-          <a:prstGeom prst="roundRect">
-            <a:avLst>
-              <a:gd name="adj" fmla="val 12000"/>
-            </a:avLst>
-          </a:prstGeom>
-          <a:solidFill>
-            <a:srgbClr val="121826"/>
-          </a:solidFill>
-          <a:ln>
-            <a:solidFill>
-              <a:srgbClr val="192032"/>
-            </a:solidFill>
-          </a:ln>
-        </p:spPr>
-        <p:style>
-          <a:lnRef idx="1">
-            <a:schemeClr val="accent1"/>
-          </a:lnRef>
-          <a:fillRef idx="3">
-            <a:schemeClr val="accent1"/>
-          </a:fillRef>
-          <a:effectRef idx="2">
-            <a:schemeClr val="accent1"/>
-          </a:effectRef>
-          <a:fontRef idx="minor">
-            <a:schemeClr val="lt1"/>
-          </a:fontRef>
-        </p:style>
-        <p:txBody>
-          <a:bodyPr rtlCol="0" anchor="ctr"/>
-          <a:lstStyle/>
-          <a:p>
-            <a:pPr algn="ctr"/>
-          </a:p>
-        </p:txBody>
-      </p:sp>
-      <p:sp>
-        <p:nvSpPr>
-          <p:cNvPr id="7" name="Rectangle 6"/>
-          <p:cNvSpPr/>
-          <p:nvPr/>
-        </p:nvSpPr>
-        <p:spPr>
-          <a:xfrm>
-            <a:off x="713232" y="1664208"/>
-            <a:ext cx="64008" cy="1298448"/>
-          </a:xfrm>
-          <a:prstGeom prst="rect">
-            <a:avLst/>
-          </a:prstGeom>
-          <a:solidFill>
-            <a:srgbClr val="22D3EE"/>
-          </a:solidFill>
-          <a:ln>
-            <a:solidFill>
-              <a:srgbClr val="22D3EE"/>
-            </a:solidFill>
-          </a:ln>
-        </p:spPr>
-        <p:style>
-          <a:lnRef idx="1">
-            <a:schemeClr val="accent1"/>
-          </a:lnRef>
-          <a:fillRef idx="3">
-            <a:schemeClr val="accent1"/>
-          </a:fillRef>
-          <a:effectRef idx="2">
-            <a:schemeClr val="accent1"/>
-          </a:effectRef>
-          <a:fontRef idx="minor">
-            <a:schemeClr val="lt1"/>
-          </a:fontRef>
-        </p:style>
-        <p:txBody>
-          <a:bodyPr rtlCol="0" anchor="ctr"/>
-          <a:lstStyle/>
-          <a:p>
-            <a:pPr algn="ctr"/>
-          </a:p>
-        </p:txBody>
-      </p:sp>
-      <p:sp>
-        <p:nvSpPr>
-          <p:cNvPr id="8" name="TextBox 7"/>
+          <p:cNvPr id="6" name="TextBox 5"/>
           <p:cNvSpPr txBox="1"/>
           <p:nvPr/>
         </p:nvSpPr>
         <p:spPr>
           <a:xfrm>
-            <a:off x="969264" y="1828800"/>
-            <a:ext cx="3017520" cy="274320"/>
+            <a:off x="731520" y="1755648"/>
+            <a:ext cx="2743200" cy="365760"/>
           </a:xfrm>
           <a:prstGeom prst="rect">
             <a:avLst/>
@@ -9587,158 +9464,27 @@
               </a:lnSpc>
             </a:pPr>
             <a:r>
-              <a:rPr sz="1200" b="1">
+              <a:rPr sz="2200" b="1">
                 <a:solidFill>
                   <a:srgbClr val="22D3EE"/>
                 </a:solidFill>
                 <a:latin typeface="Arial"/>
               </a:rPr>
-              <a:t>ПОДЕЛИТЬСЯ</a:t>
-            </a:r>
-          </a:p>
-        </p:txBody>
-      </p:sp>
-      <p:sp>
-        <p:nvSpPr>
-          <p:cNvPr id="9" name="TextBox 8"/>
+              <a:t>Следующий шаг</a:t>
+            </a:r>
+          </a:p>
+        </p:txBody>
+      </p:sp>
+      <p:sp>
+        <p:nvSpPr>
+          <p:cNvPr id="7" name="TextBox 6"/>
           <p:cNvSpPr txBox="1"/>
           <p:nvPr/>
         </p:nvSpPr>
         <p:spPr>
           <a:xfrm>
-            <a:off x="969264" y="2194560"/>
-            <a:ext cx="2962656" cy="685800"/>
-          </a:xfrm>
-          <a:prstGeom prst="rect">
-            <a:avLst/>
-          </a:prstGeom>
-          <a:noFill/>
-        </p:spPr>
-        <p:txBody>
-          <a:bodyPr wrap="square" lIns="0" rIns="0" tIns="0" bIns="0" anchor="t">
-            <a:spAutoFit/>
-          </a:bodyPr>
-          <a:lstStyle/>
-          <a:p>
-            <a:pPr algn="l">
-              <a:lnSpc>
-                <a:spcPct val="105000"/>
-              </a:lnSpc>
-            </a:pPr>
-            <a:r>
-              <a:rPr sz="1500" b="1">
-                <a:solidFill>
-                  <a:srgbClr val="F8FAFC"/>
-                </a:solidFill>
-                <a:latin typeface="Arial"/>
-              </a:rPr>
-              <a:t>Публичная ссылка или приватный токен — на видео и на весь курс</a:t>
-            </a:r>
-          </a:p>
-        </p:txBody>
-      </p:sp>
-      <p:sp>
-        <p:nvSpPr>
-          <p:cNvPr id="10" name="Rounded Rectangle 9"/>
-          <p:cNvSpPr/>
-          <p:nvPr/>
-        </p:nvSpPr>
-        <p:spPr>
-          <a:xfrm>
-            <a:off x="4489704" y="1664208"/>
-            <a:ext cx="3456432" cy="1298448"/>
-          </a:xfrm>
-          <a:prstGeom prst="roundRect">
-            <a:avLst>
-              <a:gd name="adj" fmla="val 12000"/>
-            </a:avLst>
-          </a:prstGeom>
-          <a:solidFill>
-            <a:srgbClr val="121826"/>
-          </a:solidFill>
-          <a:ln>
-            <a:solidFill>
-              <a:srgbClr val="192032"/>
-            </a:solidFill>
-          </a:ln>
-        </p:spPr>
-        <p:style>
-          <a:lnRef idx="1">
-            <a:schemeClr val="accent1"/>
-          </a:lnRef>
-          <a:fillRef idx="3">
-            <a:schemeClr val="accent1"/>
-          </a:fillRef>
-          <a:effectRef idx="2">
-            <a:schemeClr val="accent1"/>
-          </a:effectRef>
-          <a:fontRef idx="minor">
-            <a:schemeClr val="lt1"/>
-          </a:fontRef>
-        </p:style>
-        <p:txBody>
-          <a:bodyPr rtlCol="0" anchor="ctr"/>
-          <a:lstStyle/>
-          <a:p>
-            <a:pPr algn="ctr"/>
-          </a:p>
-        </p:txBody>
-      </p:sp>
-      <p:sp>
-        <p:nvSpPr>
-          <p:cNvPr id="11" name="Rectangle 10"/>
-          <p:cNvSpPr/>
-          <p:nvPr/>
-        </p:nvSpPr>
-        <p:spPr>
-          <a:xfrm>
-            <a:off x="4489704" y="1664208"/>
-            <a:ext cx="64008" cy="1298448"/>
-          </a:xfrm>
-          <a:prstGeom prst="rect">
-            <a:avLst/>
-          </a:prstGeom>
-          <a:solidFill>
-            <a:srgbClr val="A78BFA"/>
-          </a:solidFill>
-          <a:ln>
-            <a:solidFill>
-              <a:srgbClr val="A78BFA"/>
-            </a:solidFill>
-          </a:ln>
-        </p:spPr>
-        <p:style>
-          <a:lnRef idx="1">
-            <a:schemeClr val="accent1"/>
-          </a:lnRef>
-          <a:fillRef idx="3">
-            <a:schemeClr val="accent1"/>
-          </a:fillRef>
-          <a:effectRef idx="2">
-            <a:schemeClr val="accent1"/>
-          </a:effectRef>
-          <a:fontRef idx="minor">
-            <a:schemeClr val="lt1"/>
-          </a:fontRef>
-        </p:style>
-        <p:txBody>
-          <a:bodyPr rtlCol="0" anchor="ctr"/>
-          <a:lstStyle/>
-          <a:p>
-            <a:pPr algn="ctr"/>
-          </a:p>
-        </p:txBody>
-      </p:sp>
-      <p:sp>
-        <p:nvSpPr>
-          <p:cNvPr id="12" name="TextBox 11"/>
-          <p:cNvSpPr txBox="1"/>
-          <p:nvPr/>
-        </p:nvSpPr>
-        <p:spPr>
-          <a:xfrm>
-            <a:off x="4745736" y="1828800"/>
-            <a:ext cx="3017520" cy="274320"/>
+            <a:off x="731520" y="2240280"/>
+            <a:ext cx="5669280" cy="566928"/>
           </a:xfrm>
           <a:prstGeom prst="rect">
             <a:avLst/>
@@ -9757,158 +9503,27 @@
               </a:lnSpc>
             </a:pPr>
             <a:r>
-              <a:rPr sz="1200" b="1">
-                <a:solidFill>
-                  <a:srgbClr val="A78BFA"/>
+              <a:rPr sz="2600" b="1">
+                <a:solidFill>
+                  <a:srgbClr val="F8FAFC"/>
                 </a:solidFill>
                 <a:latin typeface="Arial"/>
               </a:rPr>
-              <a:t>ШПАРГАЛКА</a:t>
-            </a:r>
-          </a:p>
-        </p:txBody>
-      </p:sp>
-      <p:sp>
-        <p:nvSpPr>
-          <p:cNvPr id="13" name="TextBox 12"/>
+              <a:t>Пилот на реальной библиотеке</a:t>
+            </a:r>
+          </a:p>
+        </p:txBody>
+      </p:sp>
+      <p:sp>
+        <p:nvSpPr>
+          <p:cNvPr id="8" name="TextBox 7"/>
           <p:cNvSpPr txBox="1"/>
           <p:nvPr/>
         </p:nvSpPr>
         <p:spPr>
           <a:xfrm>
-            <a:off x="4745736" y="2194560"/>
-            <a:ext cx="2962656" cy="685800"/>
-          </a:xfrm>
-          <a:prstGeom prst="rect">
-            <a:avLst/>
-          </a:prstGeom>
-          <a:noFill/>
-        </p:spPr>
-        <p:txBody>
-          <a:bodyPr wrap="square" lIns="0" rIns="0" tIns="0" bIns="0" anchor="t">
-            <a:spAutoFit/>
-          </a:bodyPr>
-          <a:lstStyle/>
-          <a:p>
-            <a:pPr algn="l">
-              <a:lnSpc>
-                <a:spcPct val="105000"/>
-              </a:lnSpc>
-            </a:pPr>
-            <a:r>
-              <a:rPr sz="1500" b="1">
-                <a:solidFill>
-                  <a:srgbClr val="F8FAFC"/>
-                </a:solidFill>
-                <a:latin typeface="Arial"/>
-              </a:rPr>
-              <a:t>Билеты, определения и формулы по группе — из готовых конспектов</a:t>
-            </a:r>
-          </a:p>
-        </p:txBody>
-      </p:sp>
-      <p:sp>
-        <p:nvSpPr>
-          <p:cNvPr id="14" name="Rounded Rectangle 13"/>
-          <p:cNvSpPr/>
-          <p:nvPr/>
-        </p:nvSpPr>
-        <p:spPr>
-          <a:xfrm>
-            <a:off x="8266175" y="1664208"/>
-            <a:ext cx="3456432" cy="1298448"/>
-          </a:xfrm>
-          <a:prstGeom prst="roundRect">
-            <a:avLst>
-              <a:gd name="adj" fmla="val 12000"/>
-            </a:avLst>
-          </a:prstGeom>
-          <a:solidFill>
-            <a:srgbClr val="121826"/>
-          </a:solidFill>
-          <a:ln>
-            <a:solidFill>
-              <a:srgbClr val="192032"/>
-            </a:solidFill>
-          </a:ln>
-        </p:spPr>
-        <p:style>
-          <a:lnRef idx="1">
-            <a:schemeClr val="accent1"/>
-          </a:lnRef>
-          <a:fillRef idx="3">
-            <a:schemeClr val="accent1"/>
-          </a:fillRef>
-          <a:effectRef idx="2">
-            <a:schemeClr val="accent1"/>
-          </a:effectRef>
-          <a:fontRef idx="minor">
-            <a:schemeClr val="lt1"/>
-          </a:fontRef>
-        </p:style>
-        <p:txBody>
-          <a:bodyPr rtlCol="0" anchor="ctr"/>
-          <a:lstStyle/>
-          <a:p>
-            <a:pPr algn="ctr"/>
-          </a:p>
-        </p:txBody>
-      </p:sp>
-      <p:sp>
-        <p:nvSpPr>
-          <p:cNvPr id="15" name="Rectangle 14"/>
-          <p:cNvSpPr/>
-          <p:nvPr/>
-        </p:nvSpPr>
-        <p:spPr>
-          <a:xfrm>
-            <a:off x="8266175" y="1664208"/>
-            <a:ext cx="64008" cy="1298448"/>
-          </a:xfrm>
-          <a:prstGeom prst="rect">
-            <a:avLst/>
-          </a:prstGeom>
-          <a:solidFill>
-            <a:srgbClr val="34D399"/>
-          </a:solidFill>
-          <a:ln>
-            <a:solidFill>
-              <a:srgbClr val="34D399"/>
-            </a:solidFill>
-          </a:ln>
-        </p:spPr>
-        <p:style>
-          <a:lnRef idx="1">
-            <a:schemeClr val="accent1"/>
-          </a:lnRef>
-          <a:fillRef idx="3">
-            <a:schemeClr val="accent1"/>
-          </a:fillRef>
-          <a:effectRef idx="2">
-            <a:schemeClr val="accent1"/>
-          </a:effectRef>
-          <a:fontRef idx="minor">
-            <a:schemeClr val="lt1"/>
-          </a:fontRef>
-        </p:style>
-        <p:txBody>
-          <a:bodyPr rtlCol="0" anchor="ctr"/>
-          <a:lstStyle/>
-          <a:p>
-            <a:pPr algn="ctr"/>
-          </a:p>
-        </p:txBody>
-      </p:sp>
-      <p:sp>
-        <p:nvSpPr>
-          <p:cNvPr id="16" name="TextBox 15"/>
-          <p:cNvSpPr txBox="1"/>
-          <p:nvPr/>
-        </p:nvSpPr>
-        <p:spPr>
-          <a:xfrm>
-            <a:off x="8522207" y="1828800"/>
-            <a:ext cx="3017520" cy="274320"/>
+            <a:off x="749808" y="3182112"/>
+            <a:ext cx="475488" cy="274320"/>
           </a:xfrm>
           <a:prstGeom prst="rect">
             <a:avLst/>
@@ -9929,25 +9544,25 @@
             <a:r>
               <a:rPr sz="1200" b="1">
                 <a:solidFill>
-                  <a:srgbClr val="34D399"/>
+                  <a:srgbClr val="A78BFA"/>
                 </a:solidFill>
                 <a:latin typeface="Arial"/>
               </a:rPr>
-              <a:t>АККАУНТ</a:t>
-            </a:r>
-          </a:p>
-        </p:txBody>
-      </p:sp>
-      <p:sp>
-        <p:nvSpPr>
-          <p:cNvPr id="17" name="TextBox 16"/>
+              <a:t>01</a:t>
+            </a:r>
+          </a:p>
+        </p:txBody>
+      </p:sp>
+      <p:sp>
+        <p:nvSpPr>
+          <p:cNvPr id="9" name="TextBox 8"/>
           <p:cNvSpPr txBox="1"/>
           <p:nvPr/>
         </p:nvSpPr>
         <p:spPr>
           <a:xfrm>
-            <a:off x="8522207" y="2194560"/>
-            <a:ext cx="2962656" cy="685800"/>
+            <a:off x="1353312" y="3145536"/>
+            <a:ext cx="5120640" cy="438912"/>
           </a:xfrm>
           <a:prstGeom prst="rect">
             <a:avLst/>
@@ -9962,55 +9577,187 @@
           <a:p>
             <a:pPr algn="l">
               <a:lnSpc>
-                <a:spcPct val="105000"/>
+                <a:spcPct val="100000"/>
               </a:lnSpc>
             </a:pPr>
             <a:r>
-              <a:rPr sz="1500" b="1">
+              <a:rPr sz="1800" b="0">
                 <a:solidFill>
                   <a:srgbClr val="F8FAFC"/>
                 </a:solidFill>
                 <a:latin typeface="Arial"/>
               </a:rPr>
-              <a:t>Имя, пароль и завершение сессии — в настройках профиля</a:t>
-            </a:r>
-          </a:p>
-        </p:txBody>
-      </p:sp>
-      <p:pic>
-        <p:nvPicPr>
-          <p:cNvPr id="18" name="Picture 17" descr="09-share-dialog.png"/>
-          <p:cNvPicPr>
-            <a:picLocks noChangeAspect="1"/>
-          </p:cNvPicPr>
-          <p:nvPr/>
-        </p:nvPicPr>
-        <p:blipFill>
-          <a:blip r:embed="rId2"/>
-          <a:stretch>
-            <a:fillRect/>
-          </a:stretch>
-        </p:blipFill>
-        <p:spPr>
-          <a:xfrm>
-            <a:off x="713232" y="3163824"/>
-            <a:ext cx="3374136" cy="2112264"/>
-          </a:xfrm>
-          <a:prstGeom prst="rect">
-            <a:avLst/>
-          </a:prstGeom>
-        </p:spPr>
-      </p:pic>
-      <p:sp>
-        <p:nvSpPr>
-          <p:cNvPr id="19" name="Rounded Rectangle 18"/>
+              <a:t>масштабировать обработку воркерами</a:t>
+            </a:r>
+          </a:p>
+        </p:txBody>
+      </p:sp>
+      <p:sp>
+        <p:nvSpPr>
+          <p:cNvPr id="10" name="TextBox 9"/>
+          <p:cNvSpPr txBox="1"/>
+          <p:nvPr/>
+        </p:nvSpPr>
+        <p:spPr>
+          <a:xfrm>
+            <a:off x="749808" y="3840480"/>
+            <a:ext cx="475488" cy="274320"/>
+          </a:xfrm>
+          <a:prstGeom prst="rect">
+            <a:avLst/>
+          </a:prstGeom>
+          <a:noFill/>
+        </p:spPr>
+        <p:txBody>
+          <a:bodyPr wrap="square" lIns="0" rIns="0" tIns="0" bIns="0" anchor="t">
+            <a:spAutoFit/>
+          </a:bodyPr>
+          <a:lstStyle/>
+          <a:p>
+            <a:pPr algn="l">
+              <a:lnSpc>
+                <a:spcPct val="100000"/>
+              </a:lnSpc>
+            </a:pPr>
+            <a:r>
+              <a:rPr sz="1200" b="1">
+                <a:solidFill>
+                  <a:srgbClr val="A78BFA"/>
+                </a:solidFill>
+                <a:latin typeface="Arial"/>
+              </a:rPr>
+              <a:t>02</a:t>
+            </a:r>
+          </a:p>
+        </p:txBody>
+      </p:sp>
+      <p:sp>
+        <p:nvSpPr>
+          <p:cNvPr id="11" name="TextBox 10"/>
+          <p:cNvSpPr txBox="1"/>
+          <p:nvPr/>
+        </p:nvSpPr>
+        <p:spPr>
+          <a:xfrm>
+            <a:off x="1353312" y="3803904"/>
+            <a:ext cx="5120640" cy="438912"/>
+          </a:xfrm>
+          <a:prstGeom prst="rect">
+            <a:avLst/>
+          </a:prstGeom>
+          <a:noFill/>
+        </p:spPr>
+        <p:txBody>
+          <a:bodyPr wrap="square" lIns="0" rIns="0" tIns="0" bIns="0" anchor="t">
+            <a:spAutoFit/>
+          </a:bodyPr>
+          <a:lstStyle/>
+          <a:p>
+            <a:pPr algn="l">
+              <a:lnSpc>
+                <a:spcPct val="100000"/>
+              </a:lnSpc>
+            </a:pPr>
+            <a:r>
+              <a:rPr sz="1800" b="0">
+                <a:solidFill>
+                  <a:srgbClr val="F8FAFC"/>
+                </a:solidFill>
+                <a:latin typeface="Arial"/>
+              </a:rPr>
+              <a:t>добавить аналитику обучения</a:t>
+            </a:r>
+          </a:p>
+        </p:txBody>
+      </p:sp>
+      <p:sp>
+        <p:nvSpPr>
+          <p:cNvPr id="12" name="TextBox 11"/>
+          <p:cNvSpPr txBox="1"/>
+          <p:nvPr/>
+        </p:nvSpPr>
+        <p:spPr>
+          <a:xfrm>
+            <a:off x="749808" y="4498848"/>
+            <a:ext cx="475488" cy="274320"/>
+          </a:xfrm>
+          <a:prstGeom prst="rect">
+            <a:avLst/>
+          </a:prstGeom>
+          <a:noFill/>
+        </p:spPr>
+        <p:txBody>
+          <a:bodyPr wrap="square" lIns="0" rIns="0" tIns="0" bIns="0" anchor="t">
+            <a:spAutoFit/>
+          </a:bodyPr>
+          <a:lstStyle/>
+          <a:p>
+            <a:pPr algn="l">
+              <a:lnSpc>
+                <a:spcPct val="100000"/>
+              </a:lnSpc>
+            </a:pPr>
+            <a:r>
+              <a:rPr sz="1200" b="1">
+                <a:solidFill>
+                  <a:srgbClr val="A78BFA"/>
+                </a:solidFill>
+                <a:latin typeface="Arial"/>
+              </a:rPr>
+              <a:t>03</a:t>
+            </a:r>
+          </a:p>
+        </p:txBody>
+      </p:sp>
+      <p:sp>
+        <p:nvSpPr>
+          <p:cNvPr id="13" name="TextBox 12"/>
+          <p:cNvSpPr txBox="1"/>
+          <p:nvPr/>
+        </p:nvSpPr>
+        <p:spPr>
+          <a:xfrm>
+            <a:off x="1353312" y="4462272"/>
+            <a:ext cx="5120640" cy="438912"/>
+          </a:xfrm>
+          <a:prstGeom prst="rect">
+            <a:avLst/>
+          </a:prstGeom>
+          <a:noFill/>
+        </p:spPr>
+        <p:txBody>
+          <a:bodyPr wrap="square" lIns="0" rIns="0" tIns="0" bIns="0" anchor="t">
+            <a:spAutoFit/>
+          </a:bodyPr>
+          <a:lstStyle/>
+          <a:p>
+            <a:pPr algn="l">
+              <a:lnSpc>
+                <a:spcPct val="100000"/>
+              </a:lnSpc>
+            </a:pPr>
+            <a:r>
+              <a:rPr sz="1800" b="0">
+                <a:solidFill>
+                  <a:srgbClr val="F8FAFC"/>
+                </a:solidFill>
+                <a:latin typeface="Arial"/>
+              </a:rPr>
+              <a:t>расширить языки и модели</a:t>
+            </a:r>
+          </a:p>
+        </p:txBody>
+      </p:sp>
+      <p:sp>
+        <p:nvSpPr>
+          <p:cNvPr id="14" name="Rounded Rectangle 13"/>
           <p:cNvSpPr/>
           <p:nvPr/>
         </p:nvSpPr>
         <p:spPr>
           <a:xfrm>
-            <a:off x="768096" y="5376672"/>
-            <a:ext cx="2084831" cy="365760"/>
+            <a:off x="7315200" y="1719072"/>
+            <a:ext cx="3895344" cy="4224528"/>
           </a:xfrm>
           <a:prstGeom prst="roundRect">
             <a:avLst>
@@ -10050,273 +9797,14 @@
       </p:sp>
       <p:sp>
         <p:nvSpPr>
-          <p:cNvPr id="20" name="TextBox 19"/>
+          <p:cNvPr id="15" name="TextBox 14"/>
           <p:cNvSpPr txBox="1"/>
           <p:nvPr/>
         </p:nvSpPr>
         <p:spPr>
           <a:xfrm>
-            <a:off x="768096" y="5390388"/>
-            <a:ext cx="2084831" cy="310896"/>
-          </a:xfrm>
-          <a:prstGeom prst="rect">
-            <a:avLst/>
-          </a:prstGeom>
-          <a:noFill/>
-        </p:spPr>
-        <p:txBody>
-          <a:bodyPr wrap="square" lIns="0" rIns="0" tIns="0" bIns="0" anchor="ctr">
-            <a:spAutoFit/>
-          </a:bodyPr>
-          <a:lstStyle/>
-          <a:p>
-            <a:pPr algn="ctr">
-              <a:lnSpc>
-                <a:spcPct val="100000"/>
-              </a:lnSpc>
-            </a:pPr>
-            <a:r>
-              <a:rPr sz="1200" b="1">
-                <a:solidFill>
-                  <a:srgbClr val="F8FAFC"/>
-                </a:solidFill>
-                <a:latin typeface="Arial"/>
-              </a:rPr>
-              <a:t>Поделиться ссылкой</a:t>
-            </a:r>
-          </a:p>
-        </p:txBody>
-      </p:sp>
-      <p:pic>
-        <p:nvPicPr>
-          <p:cNvPr id="21" name="Picture 20" descr="08-exam-sheet.png"/>
-          <p:cNvPicPr>
-            <a:picLocks noChangeAspect="1"/>
-          </p:cNvPicPr>
-          <p:nvPr/>
-        </p:nvPicPr>
-        <p:blipFill>
-          <a:blip r:embed="rId3"/>
-          <a:stretch>
-            <a:fillRect/>
-          </a:stretch>
-        </p:blipFill>
-        <p:spPr>
-          <a:xfrm>
-            <a:off x="4407408" y="3163824"/>
-            <a:ext cx="3374136" cy="2112264"/>
-          </a:xfrm>
-          <a:prstGeom prst="rect">
-            <a:avLst/>
-          </a:prstGeom>
-        </p:spPr>
-      </p:pic>
-      <p:sp>
-        <p:nvSpPr>
-          <p:cNvPr id="22" name="Rounded Rectangle 21"/>
-          <p:cNvSpPr/>
-          <p:nvPr/>
-        </p:nvSpPr>
-        <p:spPr>
-          <a:xfrm>
-            <a:off x="4462272" y="5376672"/>
-            <a:ext cx="2084831" cy="365760"/>
-          </a:xfrm>
-          <a:prstGeom prst="roundRect">
-            <a:avLst>
-              <a:gd name="adj" fmla="val 12000"/>
-            </a:avLst>
-          </a:prstGeom>
-          <a:solidFill>
-            <a:srgbClr val="7C3AED"/>
-          </a:solidFill>
-          <a:ln>
-            <a:solidFill>
-              <a:srgbClr val="7C3AED"/>
-            </a:solidFill>
-          </a:ln>
-        </p:spPr>
-        <p:style>
-          <a:lnRef idx="1">
-            <a:schemeClr val="accent1"/>
-          </a:lnRef>
-          <a:fillRef idx="3">
-            <a:schemeClr val="accent1"/>
-          </a:fillRef>
-          <a:effectRef idx="2">
-            <a:schemeClr val="accent1"/>
-          </a:effectRef>
-          <a:fontRef idx="minor">
-            <a:schemeClr val="lt1"/>
-          </a:fontRef>
-        </p:style>
-        <p:txBody>
-          <a:bodyPr rtlCol="0" anchor="ctr"/>
-          <a:lstStyle/>
-          <a:p>
-            <a:pPr algn="ctr"/>
-          </a:p>
-        </p:txBody>
-      </p:sp>
-      <p:sp>
-        <p:nvSpPr>
-          <p:cNvPr id="23" name="TextBox 22"/>
-          <p:cNvSpPr txBox="1"/>
-          <p:nvPr/>
-        </p:nvSpPr>
-        <p:spPr>
-          <a:xfrm>
-            <a:off x="4462272" y="5390388"/>
-            <a:ext cx="2084831" cy="310896"/>
-          </a:xfrm>
-          <a:prstGeom prst="rect">
-            <a:avLst/>
-          </a:prstGeom>
-          <a:noFill/>
-        </p:spPr>
-        <p:txBody>
-          <a:bodyPr wrap="square" lIns="0" rIns="0" tIns="0" bIns="0" anchor="ctr">
-            <a:spAutoFit/>
-          </a:bodyPr>
-          <a:lstStyle/>
-          <a:p>
-            <a:pPr algn="ctr">
-              <a:lnSpc>
-                <a:spcPct val="100000"/>
-              </a:lnSpc>
-            </a:pPr>
-            <a:r>
-              <a:rPr sz="1200" b="1">
-                <a:solidFill>
-                  <a:srgbClr val="F8FAFC"/>
-                </a:solidFill>
-                <a:latin typeface="Arial"/>
-              </a:rPr>
-              <a:t>Шпаргалка к экзамену</a:t>
-            </a:r>
-          </a:p>
-        </p:txBody>
-      </p:sp>
-      <p:pic>
-        <p:nvPicPr>
-          <p:cNvPr id="24" name="Picture 23" descr="07-account-settings.png"/>
-          <p:cNvPicPr>
-            <a:picLocks noChangeAspect="1"/>
-          </p:cNvPicPr>
-          <p:nvPr/>
-        </p:nvPicPr>
-        <p:blipFill>
-          <a:blip r:embed="rId4"/>
-          <a:stretch>
-            <a:fillRect/>
-          </a:stretch>
-        </p:blipFill>
-        <p:spPr>
-          <a:xfrm>
-            <a:off x="8101583" y="3163824"/>
-            <a:ext cx="3374136" cy="2112264"/>
-          </a:xfrm>
-          <a:prstGeom prst="rect">
-            <a:avLst/>
-          </a:prstGeom>
-        </p:spPr>
-      </p:pic>
-      <p:sp>
-        <p:nvSpPr>
-          <p:cNvPr id="25" name="Rounded Rectangle 24"/>
-          <p:cNvSpPr/>
-          <p:nvPr/>
-        </p:nvSpPr>
-        <p:spPr>
-          <a:xfrm>
-            <a:off x="8156448" y="5376672"/>
-            <a:ext cx="2084831" cy="365760"/>
-          </a:xfrm>
-          <a:prstGeom prst="roundRect">
-            <a:avLst>
-              <a:gd name="adj" fmla="val 12000"/>
-            </a:avLst>
-          </a:prstGeom>
-          <a:solidFill>
-            <a:srgbClr val="22D3EE"/>
-          </a:solidFill>
-          <a:ln>
-            <a:solidFill>
-              <a:srgbClr val="22D3EE"/>
-            </a:solidFill>
-          </a:ln>
-        </p:spPr>
-        <p:style>
-          <a:lnRef idx="1">
-            <a:schemeClr val="accent1"/>
-          </a:lnRef>
-          <a:fillRef idx="3">
-            <a:schemeClr val="accent1"/>
-          </a:fillRef>
-          <a:effectRef idx="2">
-            <a:schemeClr val="accent1"/>
-          </a:effectRef>
-          <a:fontRef idx="minor">
-            <a:schemeClr val="lt1"/>
-          </a:fontRef>
-        </p:style>
-        <p:txBody>
-          <a:bodyPr rtlCol="0" anchor="ctr"/>
-          <a:lstStyle/>
-          <a:p>
-            <a:pPr algn="ctr"/>
-          </a:p>
-        </p:txBody>
-      </p:sp>
-      <p:sp>
-        <p:nvSpPr>
-          <p:cNvPr id="26" name="TextBox 25"/>
-          <p:cNvSpPr txBox="1"/>
-          <p:nvPr/>
-        </p:nvSpPr>
-        <p:spPr>
-          <a:xfrm>
-            <a:off x="8156448" y="5390388"/>
-            <a:ext cx="2084831" cy="310896"/>
-          </a:xfrm>
-          <a:prstGeom prst="rect">
-            <a:avLst/>
-          </a:prstGeom>
-          <a:noFill/>
-        </p:spPr>
-        <p:txBody>
-          <a:bodyPr wrap="square" lIns="0" rIns="0" tIns="0" bIns="0" anchor="ctr">
-            <a:spAutoFit/>
-          </a:bodyPr>
-          <a:lstStyle/>
-          <a:p>
-            <a:pPr algn="ctr">
-              <a:lnSpc>
-                <a:spcPct val="100000"/>
-              </a:lnSpc>
-            </a:pPr>
-            <a:r>
-              <a:rPr sz="1200" b="1">
-                <a:solidFill>
-                  <a:srgbClr val="080B12"/>
-                </a:solidFill>
-                <a:latin typeface="Arial"/>
-              </a:rPr>
-              <a:t>Настройки аккаунта</a:t>
-            </a:r>
-          </a:p>
-        </p:txBody>
-      </p:sp>
-      <p:sp>
-        <p:nvSpPr>
-          <p:cNvPr id="27" name="TextBox 26"/>
-          <p:cNvSpPr txBox="1"/>
-          <p:nvPr/>
-        </p:nvSpPr>
-        <p:spPr>
-          <a:xfrm>
-            <a:off x="731520" y="5907024"/>
-            <a:ext cx="10424160" cy="384048"/>
+            <a:off x="7754112" y="2249424"/>
+            <a:ext cx="2926080" cy="502920"/>
           </a:xfrm>
           <a:prstGeom prst="rect">
             <a:avLst/>
@@ -10335,53 +9823,27 @@
               </a:lnSpc>
             </a:pPr>
             <a:r>
-              <a:rPr sz="1800" b="1">
-                <a:solidFill>
-                  <a:srgbClr val="A78BFA"/>
+              <a:rPr sz="3000" b="1">
+                <a:solidFill>
+                  <a:srgbClr val="F8FAFC"/>
                 </a:solidFill>
                 <a:latin typeface="Arial"/>
               </a:rPr>
-              <a:t>Публичные и приватные ссылки не раскрывают личную библиотеку</a:t>
-            </a:r>
-          </a:p>
-        </p:txBody>
-      </p:sp>
-    </p:spTree>
-  </p:cSld>
-  <p:clrMapOvr>
-    <a:masterClrMapping/>
-  </p:clrMapOvr>
-</p:sld>
-</file>
-
-<file path=ppt/slides/slide8.xml><?xml version="1.0" encoding="utf-8"?>
-<p:sld xmlns:a="http://schemas.openxmlformats.org/drawingml/2006/main" xmlns:p="http://schemas.openxmlformats.org/presentationml/2006/main" xmlns:r="http://schemas.openxmlformats.org/officeDocument/2006/relationships">
-  <p:cSld>
-    <p:bg>
-      <p:bgPr>
-        <a:solidFill>
-          <a:srgbClr val="080B12"/>
-        </a:solidFill>
-        <a:effectLst/>
-      </p:bgPr>
-    </p:bg>
-    <p:spTree>
-      <p:nvGrpSpPr>
-        <p:cNvPr id="1" name=""/>
-        <p:cNvGrpSpPr/>
-        <p:nvPr/>
-      </p:nvGrpSpPr>
-      <p:grpSpPr/>
-      <p:sp>
-        <p:nvSpPr>
-          <p:cNvPr id="2" name="TextBox 1"/>
+              <a:t>Lectora</a:t>
+            </a:r>
+          </a:p>
+        </p:txBody>
+      </p:sp>
+      <p:sp>
+        <p:nvSpPr>
+          <p:cNvPr id="16" name="TextBox 15"/>
           <p:cNvSpPr txBox="1"/>
           <p:nvPr/>
         </p:nvSpPr>
         <p:spPr>
           <a:xfrm>
-            <a:off x="658368" y="310896"/>
-            <a:ext cx="5029200" cy="256032"/>
+            <a:off x="7754112" y="3072384"/>
+            <a:ext cx="3017520" cy="1234440"/>
           </a:xfrm>
           <a:prstGeom prst="rect">
             <a:avLst/>
@@ -10396,571 +9858,11 @@
           <a:p>
             <a:pPr algn="l">
               <a:lnSpc>
-                <a:spcPct val="100000"/>
+                <a:spcPct val="106000"/>
               </a:lnSpc>
             </a:pPr>
             <a:r>
-              <a:rPr sz="1000" b="1">
-                <a:solidFill>
-                  <a:srgbClr val="22D3EE"/>
-                </a:solidFill>
-                <a:latin typeface="Arial"/>
-              </a:rPr>
-              <a:t>ИТОГ · 20 СЕКУНД</a:t>
-            </a:r>
-          </a:p>
-        </p:txBody>
-      </p:sp>
-      <p:sp>
-        <p:nvSpPr>
-          <p:cNvPr id="3" name="TextBox 2"/>
-          <p:cNvSpPr txBox="1"/>
-          <p:nvPr/>
-        </p:nvSpPr>
-        <p:spPr>
-          <a:xfrm>
-            <a:off x="658368" y="603504"/>
-            <a:ext cx="10149840" cy="932688"/>
-          </a:xfrm>
-          <a:prstGeom prst="rect">
-            <a:avLst/>
-          </a:prstGeom>
-          <a:noFill/>
-        </p:spPr>
-        <p:txBody>
-          <a:bodyPr wrap="square" lIns="0" rIns="0" tIns="0" bIns="0" anchor="t">
-            <a:spAutoFit/>
-          </a:bodyPr>
-          <a:lstStyle/>
-          <a:p>
-            <a:pPr algn="l">
-              <a:lnSpc>
-                <a:spcPct val="100000"/>
-              </a:lnSpc>
-            </a:pPr>
-            <a:r>
-              <a:rPr sz="2800" b="1">
-                <a:solidFill>
-                  <a:srgbClr val="F8FAFC"/>
-                </a:solidFill>
-                <a:latin typeface="Arial"/>
-              </a:rPr>
-              <a:t>Lectora готова к пилоту и масштабированию после хакатона</a:t>
-            </a:r>
-          </a:p>
-        </p:txBody>
-      </p:sp>
-      <p:sp>
-        <p:nvSpPr>
-          <p:cNvPr id="4" name="Rectangle 3"/>
-          <p:cNvSpPr/>
-          <p:nvPr/>
-        </p:nvSpPr>
-        <p:spPr>
-          <a:xfrm>
-            <a:off x="658368" y="1444752"/>
-            <a:ext cx="621792" cy="50292"/>
-          </a:xfrm>
-          <a:prstGeom prst="rect">
-            <a:avLst/>
-          </a:prstGeom>
-          <a:solidFill>
-            <a:srgbClr val="7C3AED"/>
-          </a:solidFill>
-          <a:ln>
-            <a:solidFill>
-              <a:srgbClr val="7C3AED"/>
-            </a:solidFill>
-          </a:ln>
-        </p:spPr>
-        <p:style>
-          <a:lnRef idx="1">
-            <a:schemeClr val="accent1"/>
-          </a:lnRef>
-          <a:fillRef idx="3">
-            <a:schemeClr val="accent1"/>
-          </a:fillRef>
-          <a:effectRef idx="2">
-            <a:schemeClr val="accent1"/>
-          </a:effectRef>
-          <a:fontRef idx="minor">
-            <a:schemeClr val="lt1"/>
-          </a:fontRef>
-        </p:style>
-        <p:txBody>
-          <a:bodyPr rtlCol="0" anchor="ctr"/>
-          <a:lstStyle/>
-          <a:p>
-            <a:pPr algn="ctr"/>
-          </a:p>
-        </p:txBody>
-      </p:sp>
-      <p:sp>
-        <p:nvSpPr>
-          <p:cNvPr id="5" name="TextBox 4"/>
-          <p:cNvSpPr txBox="1"/>
-          <p:nvPr/>
-        </p:nvSpPr>
-        <p:spPr>
-          <a:xfrm>
-            <a:off x="11018520" y="320040"/>
-            <a:ext cx="457200" cy="274320"/>
-          </a:xfrm>
-          <a:prstGeom prst="rect">
-            <a:avLst/>
-          </a:prstGeom>
-          <a:noFill/>
-        </p:spPr>
-        <p:txBody>
-          <a:bodyPr wrap="square" lIns="0" rIns="0" tIns="0" bIns="0" anchor="t">
-            <a:spAutoFit/>
-          </a:bodyPr>
-          <a:lstStyle/>
-          <a:p>
-            <a:pPr algn="r">
-              <a:lnSpc>
-                <a:spcPct val="100000"/>
-              </a:lnSpc>
-            </a:pPr>
-            <a:r>
-              <a:rPr sz="1000" b="1">
-                <a:solidFill>
-                  <a:srgbClr val="94A3B8"/>
-                </a:solidFill>
-                <a:latin typeface="Arial"/>
-              </a:rPr>
-              <a:t>08</a:t>
-            </a:r>
-          </a:p>
-        </p:txBody>
-      </p:sp>
-      <p:sp>
-        <p:nvSpPr>
-          <p:cNvPr id="6" name="TextBox 5"/>
-          <p:cNvSpPr txBox="1"/>
-          <p:nvPr/>
-        </p:nvSpPr>
-        <p:spPr>
-          <a:xfrm>
-            <a:off x="731520" y="1755648"/>
-            <a:ext cx="2743200" cy="365760"/>
-          </a:xfrm>
-          <a:prstGeom prst="rect">
-            <a:avLst/>
-          </a:prstGeom>
-          <a:noFill/>
-        </p:spPr>
-        <p:txBody>
-          <a:bodyPr wrap="square" lIns="0" rIns="0" tIns="0" bIns="0" anchor="t">
-            <a:spAutoFit/>
-          </a:bodyPr>
-          <a:lstStyle/>
-          <a:p>
-            <a:pPr algn="l">
-              <a:lnSpc>
-                <a:spcPct val="100000"/>
-              </a:lnSpc>
-            </a:pPr>
-            <a:r>
               <a:rPr sz="2200" b="1">
-                <a:solidFill>
-                  <a:srgbClr val="22D3EE"/>
-                </a:solidFill>
-                <a:latin typeface="Arial"/>
-              </a:rPr>
-              <a:t>Следующий шаг</a:t>
-            </a:r>
-          </a:p>
-        </p:txBody>
-      </p:sp>
-      <p:sp>
-        <p:nvSpPr>
-          <p:cNvPr id="7" name="TextBox 6"/>
-          <p:cNvSpPr txBox="1"/>
-          <p:nvPr/>
-        </p:nvSpPr>
-        <p:spPr>
-          <a:xfrm>
-            <a:off x="731520" y="2240280"/>
-            <a:ext cx="5669280" cy="566928"/>
-          </a:xfrm>
-          <a:prstGeom prst="rect">
-            <a:avLst/>
-          </a:prstGeom>
-          <a:noFill/>
-        </p:spPr>
-        <p:txBody>
-          <a:bodyPr wrap="square" lIns="0" rIns="0" tIns="0" bIns="0" anchor="t">
-            <a:spAutoFit/>
-          </a:bodyPr>
-          <a:lstStyle/>
-          <a:p>
-            <a:pPr algn="l">
-              <a:lnSpc>
-                <a:spcPct val="100000"/>
-              </a:lnSpc>
-            </a:pPr>
-            <a:r>
-              <a:rPr sz="2900" b="1">
-                <a:solidFill>
-                  <a:srgbClr val="F8FAFC"/>
-                </a:solidFill>
-                <a:latin typeface="Arial"/>
-              </a:rPr>
-              <a:t>Пилот на реальной библиотеке видео</a:t>
-            </a:r>
-          </a:p>
-        </p:txBody>
-      </p:sp>
-      <p:sp>
-        <p:nvSpPr>
-          <p:cNvPr id="8" name="TextBox 7"/>
-          <p:cNvSpPr txBox="1"/>
-          <p:nvPr/>
-        </p:nvSpPr>
-        <p:spPr>
-          <a:xfrm>
-            <a:off x="749808" y="3182112"/>
-            <a:ext cx="475488" cy="274320"/>
-          </a:xfrm>
-          <a:prstGeom prst="rect">
-            <a:avLst/>
-          </a:prstGeom>
-          <a:noFill/>
-        </p:spPr>
-        <p:txBody>
-          <a:bodyPr wrap="square" lIns="0" rIns="0" tIns="0" bIns="0" anchor="t">
-            <a:spAutoFit/>
-          </a:bodyPr>
-          <a:lstStyle/>
-          <a:p>
-            <a:pPr algn="l">
-              <a:lnSpc>
-                <a:spcPct val="100000"/>
-              </a:lnSpc>
-            </a:pPr>
-            <a:r>
-              <a:rPr sz="1200" b="1">
-                <a:solidFill>
-                  <a:srgbClr val="A78BFA"/>
-                </a:solidFill>
-                <a:latin typeface="Arial"/>
-              </a:rPr>
-              <a:t>01</a:t>
-            </a:r>
-          </a:p>
-        </p:txBody>
-      </p:sp>
-      <p:sp>
-        <p:nvSpPr>
-          <p:cNvPr id="9" name="TextBox 8"/>
-          <p:cNvSpPr txBox="1"/>
-          <p:nvPr/>
-        </p:nvSpPr>
-        <p:spPr>
-          <a:xfrm>
-            <a:off x="1353312" y="3145536"/>
-            <a:ext cx="5120640" cy="438912"/>
-          </a:xfrm>
-          <a:prstGeom prst="rect">
-            <a:avLst/>
-          </a:prstGeom>
-          <a:noFill/>
-        </p:spPr>
-        <p:txBody>
-          <a:bodyPr wrap="square" lIns="0" rIns="0" tIns="0" bIns="0" anchor="t">
-            <a:spAutoFit/>
-          </a:bodyPr>
-          <a:lstStyle/>
-          <a:p>
-            <a:pPr algn="l">
-              <a:lnSpc>
-                <a:spcPct val="100000"/>
-              </a:lnSpc>
-            </a:pPr>
-            <a:r>
-              <a:rPr sz="1800" b="0">
-                <a:solidFill>
-                  <a:srgbClr val="F8FAFC"/>
-                </a:solidFill>
-                <a:latin typeface="Arial"/>
-              </a:rPr>
-              <a:t>масштабировать обработку воркерами</a:t>
-            </a:r>
-          </a:p>
-        </p:txBody>
-      </p:sp>
-      <p:sp>
-        <p:nvSpPr>
-          <p:cNvPr id="10" name="TextBox 9"/>
-          <p:cNvSpPr txBox="1"/>
-          <p:nvPr/>
-        </p:nvSpPr>
-        <p:spPr>
-          <a:xfrm>
-            <a:off x="749808" y="3840480"/>
-            <a:ext cx="475488" cy="274320"/>
-          </a:xfrm>
-          <a:prstGeom prst="rect">
-            <a:avLst/>
-          </a:prstGeom>
-          <a:noFill/>
-        </p:spPr>
-        <p:txBody>
-          <a:bodyPr wrap="square" lIns="0" rIns="0" tIns="0" bIns="0" anchor="t">
-            <a:spAutoFit/>
-          </a:bodyPr>
-          <a:lstStyle/>
-          <a:p>
-            <a:pPr algn="l">
-              <a:lnSpc>
-                <a:spcPct val="100000"/>
-              </a:lnSpc>
-            </a:pPr>
-            <a:r>
-              <a:rPr sz="1200" b="1">
-                <a:solidFill>
-                  <a:srgbClr val="A78BFA"/>
-                </a:solidFill>
-                <a:latin typeface="Arial"/>
-              </a:rPr>
-              <a:t>02</a:t>
-            </a:r>
-          </a:p>
-        </p:txBody>
-      </p:sp>
-      <p:sp>
-        <p:nvSpPr>
-          <p:cNvPr id="11" name="TextBox 10"/>
-          <p:cNvSpPr txBox="1"/>
-          <p:nvPr/>
-        </p:nvSpPr>
-        <p:spPr>
-          <a:xfrm>
-            <a:off x="1353312" y="3803904"/>
-            <a:ext cx="5120640" cy="438912"/>
-          </a:xfrm>
-          <a:prstGeom prst="rect">
-            <a:avLst/>
-          </a:prstGeom>
-          <a:noFill/>
-        </p:spPr>
-        <p:txBody>
-          <a:bodyPr wrap="square" lIns="0" rIns="0" tIns="0" bIns="0" anchor="t">
-            <a:spAutoFit/>
-          </a:bodyPr>
-          <a:lstStyle/>
-          <a:p>
-            <a:pPr algn="l">
-              <a:lnSpc>
-                <a:spcPct val="100000"/>
-              </a:lnSpc>
-            </a:pPr>
-            <a:r>
-              <a:rPr sz="1800" b="0">
-                <a:solidFill>
-                  <a:srgbClr val="F8FAFC"/>
-                </a:solidFill>
-                <a:latin typeface="Arial"/>
-              </a:rPr>
-              <a:t>добавить аналитику обучения</a:t>
-            </a:r>
-          </a:p>
-        </p:txBody>
-      </p:sp>
-      <p:sp>
-        <p:nvSpPr>
-          <p:cNvPr id="12" name="TextBox 11"/>
-          <p:cNvSpPr txBox="1"/>
-          <p:nvPr/>
-        </p:nvSpPr>
-        <p:spPr>
-          <a:xfrm>
-            <a:off x="749808" y="4498848"/>
-            <a:ext cx="475488" cy="274320"/>
-          </a:xfrm>
-          <a:prstGeom prst="rect">
-            <a:avLst/>
-          </a:prstGeom>
-          <a:noFill/>
-        </p:spPr>
-        <p:txBody>
-          <a:bodyPr wrap="square" lIns="0" rIns="0" tIns="0" bIns="0" anchor="t">
-            <a:spAutoFit/>
-          </a:bodyPr>
-          <a:lstStyle/>
-          <a:p>
-            <a:pPr algn="l">
-              <a:lnSpc>
-                <a:spcPct val="100000"/>
-              </a:lnSpc>
-            </a:pPr>
-            <a:r>
-              <a:rPr sz="1200" b="1">
-                <a:solidFill>
-                  <a:srgbClr val="A78BFA"/>
-                </a:solidFill>
-                <a:latin typeface="Arial"/>
-              </a:rPr>
-              <a:t>03</a:t>
-            </a:r>
-          </a:p>
-        </p:txBody>
-      </p:sp>
-      <p:sp>
-        <p:nvSpPr>
-          <p:cNvPr id="13" name="TextBox 12"/>
-          <p:cNvSpPr txBox="1"/>
-          <p:nvPr/>
-        </p:nvSpPr>
-        <p:spPr>
-          <a:xfrm>
-            <a:off x="1353312" y="4462272"/>
-            <a:ext cx="5120640" cy="438912"/>
-          </a:xfrm>
-          <a:prstGeom prst="rect">
-            <a:avLst/>
-          </a:prstGeom>
-          <a:noFill/>
-        </p:spPr>
-        <p:txBody>
-          <a:bodyPr wrap="square" lIns="0" rIns="0" tIns="0" bIns="0" anchor="t">
-            <a:spAutoFit/>
-          </a:bodyPr>
-          <a:lstStyle/>
-          <a:p>
-            <a:pPr algn="l">
-              <a:lnSpc>
-                <a:spcPct val="100000"/>
-              </a:lnSpc>
-            </a:pPr>
-            <a:r>
-              <a:rPr sz="1800" b="0">
-                <a:solidFill>
-                  <a:srgbClr val="F8FAFC"/>
-                </a:solidFill>
-                <a:latin typeface="Arial"/>
-              </a:rPr>
-              <a:t>расширить языки и модели</a:t>
-            </a:r>
-          </a:p>
-        </p:txBody>
-      </p:sp>
-      <p:sp>
-        <p:nvSpPr>
-          <p:cNvPr id="14" name="Rounded Rectangle 13"/>
-          <p:cNvSpPr/>
-          <p:nvPr/>
-        </p:nvSpPr>
-        <p:spPr>
-          <a:xfrm>
-            <a:off x="7315200" y="1719072"/>
-            <a:ext cx="3895344" cy="4224528"/>
-          </a:xfrm>
-          <a:prstGeom prst="roundRect">
-            <a:avLst>
-              <a:gd name="adj" fmla="val 12000"/>
-            </a:avLst>
-          </a:prstGeom>
-          <a:solidFill>
-            <a:srgbClr val="7C3AED"/>
-          </a:solidFill>
-          <a:ln>
-            <a:solidFill>
-              <a:srgbClr val="7C3AED"/>
-            </a:solidFill>
-          </a:ln>
-        </p:spPr>
-        <p:style>
-          <a:lnRef idx="1">
-            <a:schemeClr val="accent1"/>
-          </a:lnRef>
-          <a:fillRef idx="3">
-            <a:schemeClr val="accent1"/>
-          </a:fillRef>
-          <a:effectRef idx="2">
-            <a:schemeClr val="accent1"/>
-          </a:effectRef>
-          <a:fontRef idx="minor">
-            <a:schemeClr val="lt1"/>
-          </a:fontRef>
-        </p:style>
-        <p:txBody>
-          <a:bodyPr rtlCol="0" anchor="ctr"/>
-          <a:lstStyle/>
-          <a:p>
-            <a:pPr algn="ctr"/>
-          </a:p>
-        </p:txBody>
-      </p:sp>
-      <p:sp>
-        <p:nvSpPr>
-          <p:cNvPr id="15" name="TextBox 14"/>
-          <p:cNvSpPr txBox="1"/>
-          <p:nvPr/>
-        </p:nvSpPr>
-        <p:spPr>
-          <a:xfrm>
-            <a:off x="7754112" y="2249424"/>
-            <a:ext cx="2926080" cy="502920"/>
-          </a:xfrm>
-          <a:prstGeom prst="rect">
-            <a:avLst/>
-          </a:prstGeom>
-          <a:noFill/>
-        </p:spPr>
-        <p:txBody>
-          <a:bodyPr wrap="square" lIns="0" rIns="0" tIns="0" bIns="0" anchor="t">
-            <a:spAutoFit/>
-          </a:bodyPr>
-          <a:lstStyle/>
-          <a:p>
-            <a:pPr algn="l">
-              <a:lnSpc>
-                <a:spcPct val="100000"/>
-              </a:lnSpc>
-            </a:pPr>
-            <a:r>
-              <a:rPr sz="3000" b="1">
-                <a:solidFill>
-                  <a:srgbClr val="F8FAFC"/>
-                </a:solidFill>
-                <a:latin typeface="Arial"/>
-              </a:rPr>
-              <a:t>Lectora</a:t>
-            </a:r>
-          </a:p>
-        </p:txBody>
-      </p:sp>
-      <p:sp>
-        <p:nvSpPr>
-          <p:cNvPr id="16" name="TextBox 15"/>
-          <p:cNvSpPr txBox="1"/>
-          <p:nvPr/>
-        </p:nvSpPr>
-        <p:spPr>
-          <a:xfrm>
-            <a:off x="7754112" y="3072384"/>
-            <a:ext cx="2926080" cy="1097280"/>
-          </a:xfrm>
-          <a:prstGeom prst="rect">
-            <a:avLst/>
-          </a:prstGeom>
-          <a:noFill/>
-        </p:spPr>
-        <p:txBody>
-          <a:bodyPr wrap="square" lIns="0" rIns="0" tIns="0" bIns="0" anchor="t">
-            <a:spAutoFit/>
-          </a:bodyPr>
-          <a:lstStyle/>
-          <a:p>
-            <a:pPr algn="l">
-              <a:lnSpc>
-                <a:spcPct val="100000"/>
-              </a:lnSpc>
-            </a:pPr>
-            <a:r>
-              <a:rPr sz="2600" b="1">
                 <a:solidFill>
                   <a:srgbClr val="F8FAFC"/>
                 </a:solidFill>
